--- a/multi_agent_systems_slide_1_to_6/Slides-01-06-GIF.pptx
+++ b/multi_agent_systems_slide_1_to_6/Slides-01-06-GIF.pptx
@@ -115,35 +115,35 @@
   <p:extLst>
     <p:ext uri="{521415D9-36F7-43E2-AB2F-B90AF26B5E84}">
       <p14:sectionLst xmlns:p14="http://schemas.microsoft.com/office/powerpoint/2010/main">
-        <p14:section name="1 · Response Codes" id="{4EBB7695-56BF-40F7-B875-38637C028F16}">
+        <p14:section name="1 · Response Codes" id="{C1CE7BD1-2A2E-4DF3-983C-CC3A249F70D3}">
           <p14:sldIdLst>
             <p14:sldId id="256"/>
           </p14:sldIdLst>
         </p14:section>
-        <p14:section name="2 · Why Single Agents Fail" id="{4675FB4A-F305-4581-B576-5B30989241C3}">
+        <p14:section name="2 · Why Single Agents Fail" id="{68428781-C9D6-4D47-9C4D-A8C726138FD6}">
           <p14:sldIdLst>
             <p14:sldId id="299"/>
             <p14:sldId id="300"/>
           </p14:sldIdLst>
         </p14:section>
-        <p14:section name="3 · Why Single Agents Fail – Part 2" id="{82F1E7E5-AABC-4C02-B0EE-1496555E4478}">
+        <p14:section name="3 · Why Single Agents Fail – Part 2" id="{0AA38D7A-014F-49E2-8C3C-A10F7493B6BE}">
           <p14:sldIdLst>
             <p14:sldId id="284"/>
             <p14:sldId id="285"/>
           </p14:sldIdLst>
         </p14:section>
-        <p14:section name="4 · Failure Modes" id="{C4D28382-E2C2-4B96-929D-38B201E9CFE2}">
+        <p14:section name="4 · Failure Modes" id="{513274A2-AA96-4028-8E97-6D0DF19A4753}">
           <p14:sldIdLst>
             <p14:sldId id="288"/>
           </p14:sldIdLst>
         </p14:section>
-        <p14:section name="5 · Root Cause" id="{0FC4997B-D564-4146-B600-45D4F937D91B}">
+        <p14:section name="5 · Root Cause" id="{F7EC6862-F1DA-48D9-A62D-F5B5407A03DF}">
           <p14:sldIdLst>
             <p14:sldId id="289"/>
             <p14:sldId id="294"/>
           </p14:sldIdLst>
         </p14:section>
-        <p14:section name="6 · Core Idea" id="{3F8BE447-128F-474D-A34C-05681F5AF728}">
+        <p14:section name="6 · Core Idea" id="{10180076-7466-4775-A4F0-ACE9DA7514DE}">
           <p14:sldIdLst>
             <p14:sldId id="301"/>
           </p14:sldIdLst>
@@ -1890,46 +1890,7 @@
       </p:sp>
       <p:sp>
         <p:nvSpPr>
-          <p:cNvPr id="5" name="!!restricted"/>
-          <p:cNvSpPr txBox="1"/>
-          <p:nvPr/>
-        </p:nvSpPr>
-        <p:spPr>
-          <a:xfrm>
-            <a:off x="5184648" y="6556248"/>
-            <a:ext cx="1828800" cy="201168"/>
-          </a:xfrm>
-          <a:prstGeom prst="rect">
-            <a:avLst/>
-          </a:prstGeom>
-          <a:noFill/>
-          <a:ln/>
-        </p:spPr>
-        <p:txBody>
-          <a:bodyPr wrap="square" lIns="0" tIns="0" rIns="0" bIns="0" rtlCol="0" anchor="ctr"/>
-          <a:lstStyle/>
-          <a:p>
-            <a:pPr algn="ctr" indent="0" marL="0">
-              <a:buNone/>
-            </a:pPr>
-            <a:r>
-              <a:rPr lang="en-US" sz="800" dirty="0">
-                <a:solidFill>
-                  <a:srgbClr val="7F7F7F"/>
-                </a:solidFill>
-                <a:latin typeface="Arial" pitchFamily="34" charset="0"/>
-                <a:ea typeface="Arial" pitchFamily="34" charset="-122"/>
-                <a:cs typeface="Arial" pitchFamily="34" charset="-120"/>
-              </a:rPr>
-              <a:t>RESTRICTED</a:t>
-            </a:r>
-            <a:endParaRPr lang="en-US" sz="800" dirty="0"/>
-          </a:p>
-        </p:txBody>
-      </p:sp>
-      <p:sp>
-        <p:nvSpPr>
-          <p:cNvPr id="6" name="Text 4"/>
+          <p:cNvPr id="5" name="Text 3"/>
           <p:cNvSpPr txBox="1"/>
           <p:nvPr/>
         </p:nvSpPr>
@@ -1968,7 +1929,7 @@
       </p:sp>
       <p:sp>
         <p:nvSpPr>
-          <p:cNvPr id="7" name="!!jsonbox"/>
+          <p:cNvPr id="6" name="!!jsonbox"/>
           <p:cNvSpPr/>
           <p:nvPr/>
         </p:nvSpPr>
@@ -2005,7 +1966,7 @@
       </p:sp>
       <p:sp>
         <p:nvSpPr>
-          <p:cNvPr id="8" name="!!jsonhi"/>
+          <p:cNvPr id="7" name="!!jsonhi"/>
           <p:cNvSpPr/>
           <p:nvPr/>
         </p:nvSpPr>
@@ -2042,7 +2003,7 @@
       </p:sp>
       <p:sp>
         <p:nvSpPr>
-          <p:cNvPr id="9" name="!!json0"/>
+          <p:cNvPr id="8" name="!!json0"/>
           <p:cNvSpPr txBox="1"/>
           <p:nvPr/>
         </p:nvSpPr>
@@ -2081,7 +2042,7 @@
       </p:sp>
       <p:sp>
         <p:nvSpPr>
-          <p:cNvPr id="10" name="!!json1"/>
+          <p:cNvPr id="9" name="!!json1"/>
           <p:cNvSpPr txBox="1"/>
           <p:nvPr/>
         </p:nvSpPr>
@@ -2120,7 +2081,7 @@
       </p:sp>
       <p:sp>
         <p:nvSpPr>
-          <p:cNvPr id="11" name="!!json2"/>
+          <p:cNvPr id="10" name="!!json2"/>
           <p:cNvSpPr txBox="1"/>
           <p:nvPr/>
         </p:nvSpPr>
@@ -2159,7 +2120,7 @@
       </p:sp>
       <p:sp>
         <p:nvSpPr>
-          <p:cNvPr id="12" name="!!json3"/>
+          <p:cNvPr id="11" name="!!json3"/>
           <p:cNvSpPr txBox="1"/>
           <p:nvPr/>
         </p:nvSpPr>
@@ -2198,7 +2159,7 @@
       </p:sp>
       <p:sp>
         <p:nvSpPr>
-          <p:cNvPr id="13" name="!!json4"/>
+          <p:cNvPr id="12" name="!!json4"/>
           <p:cNvSpPr txBox="1"/>
           <p:nvPr/>
         </p:nvSpPr>
@@ -2237,7 +2198,7 @@
       </p:sp>
       <p:sp>
         <p:nvSpPr>
-          <p:cNvPr id="14" name="!!json5"/>
+          <p:cNvPr id="13" name="!!json5"/>
           <p:cNvSpPr txBox="1"/>
           <p:nvPr/>
         </p:nvSpPr>
@@ -2276,7 +2237,7 @@
       </p:sp>
       <p:sp>
         <p:nvSpPr>
-          <p:cNvPr id="15" name="!!json6"/>
+          <p:cNvPr id="14" name="!!json6"/>
           <p:cNvSpPr txBox="1"/>
           <p:nvPr/>
         </p:nvSpPr>
@@ -2315,7 +2276,7 @@
       </p:sp>
       <p:sp>
         <p:nvSpPr>
-          <p:cNvPr id="16" name="!!json7"/>
+          <p:cNvPr id="15" name="!!json7"/>
           <p:cNvSpPr txBox="1"/>
           <p:nvPr/>
         </p:nvSpPr>
@@ -2354,7 +2315,7 @@
       </p:sp>
       <p:sp>
         <p:nvSpPr>
-          <p:cNvPr id="17" name="!!json8"/>
+          <p:cNvPr id="16" name="!!json8"/>
           <p:cNvSpPr txBox="1"/>
           <p:nvPr/>
         </p:nvSpPr>
@@ -2393,7 +2354,7 @@
       </p:sp>
       <p:sp>
         <p:nvSpPr>
-          <p:cNvPr id="18" name="!!json9"/>
+          <p:cNvPr id="17" name="!!json9"/>
           <p:cNvSpPr txBox="1"/>
           <p:nvPr/>
         </p:nvSpPr>
@@ -2432,7 +2393,7 @@
       </p:sp>
       <p:sp>
         <p:nvSpPr>
-          <p:cNvPr id="19" name="!!json10"/>
+          <p:cNvPr id="18" name="!!json10"/>
           <p:cNvSpPr txBox="1"/>
           <p:nvPr/>
         </p:nvSpPr>
@@ -2471,7 +2432,7 @@
       </p:sp>
       <p:sp>
         <p:nvSpPr>
-          <p:cNvPr id="20" name="!!json11"/>
+          <p:cNvPr id="19" name="!!json11"/>
           <p:cNvSpPr txBox="1"/>
           <p:nvPr/>
         </p:nvSpPr>
@@ -2510,7 +2471,7 @@
       </p:sp>
       <p:sp>
         <p:nvSpPr>
-          <p:cNvPr id="21" name="!!json12"/>
+          <p:cNvPr id="20" name="!!json12"/>
           <p:cNvSpPr txBox="1"/>
           <p:nvPr/>
         </p:nvSpPr>
@@ -2549,7 +2510,7 @@
       </p:sp>
       <p:sp>
         <p:nvSpPr>
-          <p:cNvPr id="22" name="!!json13"/>
+          <p:cNvPr id="21" name="!!json13"/>
           <p:cNvSpPr txBox="1"/>
           <p:nvPr/>
         </p:nvSpPr>
@@ -2588,7 +2549,7 @@
       </p:sp>
       <p:sp>
         <p:nvSpPr>
-          <p:cNvPr id="23" name="!!json14"/>
+          <p:cNvPr id="22" name="!!json14"/>
           <p:cNvSpPr txBox="1"/>
           <p:nvPr/>
         </p:nvSpPr>
@@ -2627,7 +2588,7 @@
       </p:sp>
       <p:sp>
         <p:nvSpPr>
-          <p:cNvPr id="24" name="!!json15"/>
+          <p:cNvPr id="23" name="!!json15"/>
           <p:cNvSpPr txBox="1"/>
           <p:nvPr/>
         </p:nvSpPr>
@@ -2666,7 +2627,7 @@
       </p:sp>
       <p:sp>
         <p:nvSpPr>
-          <p:cNvPr id="25" name="!!json16"/>
+          <p:cNvPr id="24" name="!!json16"/>
           <p:cNvSpPr txBox="1"/>
           <p:nvPr/>
         </p:nvSpPr>
@@ -2705,7 +2666,7 @@
       </p:sp>
       <p:sp>
         <p:nvSpPr>
-          <p:cNvPr id="26" name="!!jsonlbl"/>
+          <p:cNvPr id="25" name="!!jsonlbl"/>
           <p:cNvSpPr/>
           <p:nvPr/>
         </p:nvSpPr>
@@ -2753,7 +2714,7 @@
       </p:sp>
       <p:sp>
         <p:nvSpPr>
-          <p:cNvPr id="27" name="!!jsoncap"/>
+          <p:cNvPr id="26" name="!!jsoncap"/>
           <p:cNvSpPr txBox="1"/>
           <p:nvPr/>
         </p:nvSpPr>
@@ -2806,7 +2767,7 @@
       </p:sp>
       <p:sp>
         <p:nvSpPr>
-          <p:cNvPr id="28" name="Text 26"/>
+          <p:cNvPr id="27" name="Text 25"/>
           <p:cNvSpPr txBox="1"/>
           <p:nvPr/>
         </p:nvSpPr>
@@ -4461,7 +4422,7 @@
       </p:graphicFrame>
       <p:sp>
         <p:nvSpPr>
-          <p:cNvPr id="30" name="!!gemnote"/>
+          <p:cNvPr id="29" name="!!gemnote"/>
           <p:cNvSpPr txBox="1"/>
           <p:nvPr/>
         </p:nvSpPr>
@@ -4500,7 +4461,7 @@
       </p:sp>
       <p:sp>
         <p:nvSpPr>
-          <p:cNvPr id="31" name="Text 28"/>
+          <p:cNvPr id="30" name="Text 27"/>
           <p:cNvSpPr txBox="1"/>
           <p:nvPr/>
         </p:nvSpPr>
@@ -4539,7 +4500,7 @@
       </p:sp>
       <p:sp>
         <p:nvSpPr>
-          <p:cNvPr id="32" name="!!act0"/>
+          <p:cNvPr id="31" name="!!act0"/>
           <p:cNvSpPr/>
           <p:nvPr/>
         </p:nvSpPr>
@@ -4601,7 +4562,7 @@
       </p:sp>
       <p:sp>
         <p:nvSpPr>
-          <p:cNvPr id="33" name="!!act1"/>
+          <p:cNvPr id="32" name="!!act1"/>
           <p:cNvSpPr/>
           <p:nvPr/>
         </p:nvSpPr>
@@ -4663,7 +4624,7 @@
       </p:sp>
       <p:sp>
         <p:nvSpPr>
-          <p:cNvPr id="34" name="!!act2"/>
+          <p:cNvPr id="33" name="!!act2"/>
           <p:cNvSpPr/>
           <p:nvPr/>
         </p:nvSpPr>
@@ -4725,7 +4686,7 @@
       </p:sp>
       <p:sp>
         <p:nvSpPr>
-          <p:cNvPr id="35" name="!!act3"/>
+          <p:cNvPr id="34" name="!!act3"/>
           <p:cNvSpPr/>
           <p:nvPr/>
         </p:nvSpPr>
@@ -4787,7 +4748,7 @@
       </p:sp>
       <p:sp>
         <p:nvSpPr>
-          <p:cNvPr id="36" name="!!bridge1"/>
+          <p:cNvPr id="35" name="!!bridge1"/>
           <p:cNvSpPr/>
           <p:nvPr/>
         </p:nvSpPr>
@@ -5030,46 +4991,7 @@
       </p:sp>
       <p:sp>
         <p:nvSpPr>
-          <p:cNvPr id="5" name="!!restricted"/>
-          <p:cNvSpPr txBox="1"/>
-          <p:nvPr/>
-        </p:nvSpPr>
-        <p:spPr>
-          <a:xfrm>
-            <a:off x="5184648" y="6556248"/>
-            <a:ext cx="1828800" cy="201168"/>
-          </a:xfrm>
-          <a:prstGeom prst="rect">
-            <a:avLst/>
-          </a:prstGeom>
-          <a:noFill/>
-          <a:ln/>
-        </p:spPr>
-        <p:txBody>
-          <a:bodyPr wrap="square" lIns="0" tIns="0" rIns="0" bIns="0" rtlCol="0" anchor="ctr"/>
-          <a:lstStyle/>
-          <a:p>
-            <a:pPr algn="ctr" indent="0" marL="0">
-              <a:buNone/>
-            </a:pPr>
-            <a:r>
-              <a:rPr lang="en-US" sz="800" dirty="0">
-                <a:solidFill>
-                  <a:srgbClr val="7F7F7F"/>
-                </a:solidFill>
-                <a:latin typeface="Arial" pitchFamily="34" charset="0"/>
-                <a:ea typeface="Arial" pitchFamily="34" charset="-122"/>
-                <a:cs typeface="Arial" pitchFamily="34" charset="-120"/>
-              </a:rPr>
-              <a:t>RESTRICTED</a:t>
-            </a:r>
-            <a:endParaRPr lang="en-US" sz="800" dirty="0"/>
-          </a:p>
-        </p:txBody>
-      </p:sp>
-      <p:sp>
-        <p:nvSpPr>
-          <p:cNvPr id="6" name="!!hdm"/>
+          <p:cNvPr id="5" name="!!hdm"/>
           <p:cNvSpPr txBox="1"/>
           <p:nvPr/>
         </p:nvSpPr>
@@ -5108,7 +5030,7 @@
       </p:sp>
       <p:sp>
         <p:nvSpPr>
-          <p:cNvPr id="7" name="!!blk01"/>
+          <p:cNvPr id="6" name="!!blk01"/>
           <p:cNvSpPr/>
           <p:nvPr/>
         </p:nvSpPr>
@@ -5156,7 +5078,7 @@
       </p:sp>
       <p:sp>
         <p:nvSpPr>
-          <p:cNvPr id="8" name="!!tag01"/>
+          <p:cNvPr id="7" name="!!tag01"/>
           <p:cNvSpPr txBox="1"/>
           <p:nvPr/>
         </p:nvSpPr>
@@ -5195,7 +5117,7 @@
       </p:sp>
       <p:sp>
         <p:nvSpPr>
-          <p:cNvPr id="9" name="!!blk02"/>
+          <p:cNvPr id="8" name="!!blk02"/>
           <p:cNvSpPr/>
           <p:nvPr/>
         </p:nvSpPr>
@@ -5243,7 +5165,7 @@
       </p:sp>
       <p:sp>
         <p:nvSpPr>
-          <p:cNvPr id="10" name="!!tag02"/>
+          <p:cNvPr id="9" name="!!tag02"/>
           <p:cNvSpPr txBox="1"/>
           <p:nvPr/>
         </p:nvSpPr>
@@ -5282,7 +5204,7 @@
       </p:sp>
       <p:sp>
         <p:nvSpPr>
-          <p:cNvPr id="11" name="!!blk03"/>
+          <p:cNvPr id="10" name="!!blk03"/>
           <p:cNvSpPr/>
           <p:nvPr/>
         </p:nvSpPr>
@@ -5330,7 +5252,7 @@
       </p:sp>
       <p:sp>
         <p:nvSpPr>
-          <p:cNvPr id="12" name="!!tag03"/>
+          <p:cNvPr id="11" name="!!tag03"/>
           <p:cNvSpPr txBox="1"/>
           <p:nvPr/>
         </p:nvSpPr>
@@ -5369,7 +5291,7 @@
       </p:sp>
       <p:sp>
         <p:nvSpPr>
-          <p:cNvPr id="13" name="!!blk04"/>
+          <p:cNvPr id="12" name="!!blk04"/>
           <p:cNvSpPr/>
           <p:nvPr/>
         </p:nvSpPr>
@@ -5417,7 +5339,7 @@
       </p:sp>
       <p:sp>
         <p:nvSpPr>
-          <p:cNvPr id="14" name="!!tag04"/>
+          <p:cNvPr id="13" name="!!tag04"/>
           <p:cNvSpPr txBox="1"/>
           <p:nvPr/>
         </p:nvSpPr>
@@ -5456,7 +5378,7 @@
       </p:sp>
       <p:sp>
         <p:nvSpPr>
-          <p:cNvPr id="15" name="!!blk05"/>
+          <p:cNvPr id="14" name="!!blk05"/>
           <p:cNvSpPr/>
           <p:nvPr/>
         </p:nvSpPr>
@@ -5504,7 +5426,7 @@
       </p:sp>
       <p:sp>
         <p:nvSpPr>
-          <p:cNvPr id="16" name="!!tag05"/>
+          <p:cNvPr id="15" name="!!tag05"/>
           <p:cNvSpPr txBox="1"/>
           <p:nvPr/>
         </p:nvSpPr>
@@ -5543,7 +5465,7 @@
       </p:sp>
       <p:sp>
         <p:nvSpPr>
-          <p:cNvPr id="17" name="!!blk06"/>
+          <p:cNvPr id="16" name="!!blk06"/>
           <p:cNvSpPr/>
           <p:nvPr/>
         </p:nvSpPr>
@@ -5591,7 +5513,7 @@
       </p:sp>
       <p:sp>
         <p:nvSpPr>
-          <p:cNvPr id="18" name="!!tag06"/>
+          <p:cNvPr id="17" name="!!tag06"/>
           <p:cNvSpPr txBox="1"/>
           <p:nvPr/>
         </p:nvSpPr>
@@ -5630,7 +5552,7 @@
       </p:sp>
       <p:sp>
         <p:nvSpPr>
-          <p:cNvPr id="19" name="!!blk07"/>
+          <p:cNvPr id="18" name="!!blk07"/>
           <p:cNvSpPr/>
           <p:nvPr/>
         </p:nvSpPr>
@@ -5678,7 +5600,7 @@
       </p:sp>
       <p:sp>
         <p:nvSpPr>
-          <p:cNvPr id="20" name="!!tag07"/>
+          <p:cNvPr id="19" name="!!tag07"/>
           <p:cNvSpPr txBox="1"/>
           <p:nvPr/>
         </p:nvSpPr>
@@ -5717,7 +5639,7 @@
       </p:sp>
       <p:sp>
         <p:nvSpPr>
-          <p:cNvPr id="21" name="!!blk08"/>
+          <p:cNvPr id="20" name="!!blk08"/>
           <p:cNvSpPr/>
           <p:nvPr/>
         </p:nvSpPr>
@@ -5765,7 +5687,7 @@
       </p:sp>
       <p:sp>
         <p:nvSpPr>
-          <p:cNvPr id="22" name="!!tag08"/>
+          <p:cNvPr id="21" name="!!tag08"/>
           <p:cNvSpPr txBox="1"/>
           <p:nvPr/>
         </p:nvSpPr>
@@ -5804,7 +5726,7 @@
       </p:sp>
       <p:sp>
         <p:nvSpPr>
-          <p:cNvPr id="23" name="!!blk09"/>
+          <p:cNvPr id="22" name="!!blk09"/>
           <p:cNvSpPr/>
           <p:nvPr/>
         </p:nvSpPr>
@@ -5852,7 +5774,7 @@
       </p:sp>
       <p:sp>
         <p:nvSpPr>
-          <p:cNvPr id="24" name="!!tag09"/>
+          <p:cNvPr id="23" name="!!tag09"/>
           <p:cNvSpPr txBox="1"/>
           <p:nvPr/>
         </p:nvSpPr>
@@ -5891,7 +5813,7 @@
       </p:sp>
       <p:sp>
         <p:nvSpPr>
-          <p:cNvPr id="25" name="!!blk10"/>
+          <p:cNvPr id="24" name="!!blk10"/>
           <p:cNvSpPr/>
           <p:nvPr/>
         </p:nvSpPr>
@@ -5939,7 +5861,7 @@
       </p:sp>
       <p:sp>
         <p:nvSpPr>
-          <p:cNvPr id="26" name="!!tag10"/>
+          <p:cNvPr id="25" name="!!tag10"/>
           <p:cNvSpPr txBox="1"/>
           <p:nvPr/>
         </p:nvSpPr>
@@ -5978,7 +5900,7 @@
       </p:sp>
       <p:sp>
         <p:nvSpPr>
-          <p:cNvPr id="27" name="!!blk11"/>
+          <p:cNvPr id="26" name="!!blk11"/>
           <p:cNvSpPr/>
           <p:nvPr/>
         </p:nvSpPr>
@@ -6026,7 +5948,7 @@
       </p:sp>
       <p:sp>
         <p:nvSpPr>
-          <p:cNvPr id="28" name="!!tag11"/>
+          <p:cNvPr id="27" name="!!tag11"/>
           <p:cNvSpPr txBox="1"/>
           <p:nvPr/>
         </p:nvSpPr>
@@ -6065,7 +5987,7 @@
       </p:sp>
       <p:sp>
         <p:nvSpPr>
-          <p:cNvPr id="29" name="!!blk12"/>
+          <p:cNvPr id="28" name="!!blk12"/>
           <p:cNvSpPr/>
           <p:nvPr/>
         </p:nvSpPr>
@@ -6113,7 +6035,7 @@
       </p:sp>
       <p:sp>
         <p:nvSpPr>
-          <p:cNvPr id="30" name="!!tag12"/>
+          <p:cNvPr id="29" name="!!tag12"/>
           <p:cNvSpPr txBox="1"/>
           <p:nvPr/>
         </p:nvSpPr>
@@ -6152,7 +6074,7 @@
       </p:sp>
       <p:sp>
         <p:nvSpPr>
-          <p:cNvPr id="31" name="!!blk13"/>
+          <p:cNvPr id="30" name="!!blk13"/>
           <p:cNvSpPr/>
           <p:nvPr/>
         </p:nvSpPr>
@@ -6200,7 +6122,7 @@
       </p:sp>
       <p:sp>
         <p:nvSpPr>
-          <p:cNvPr id="32" name="!!tag13"/>
+          <p:cNvPr id="31" name="!!tag13"/>
           <p:cNvSpPr txBox="1"/>
           <p:nvPr/>
         </p:nvSpPr>
@@ -6239,7 +6161,7 @@
       </p:sp>
       <p:sp>
         <p:nvSpPr>
-          <p:cNvPr id="33" name="!!blk14"/>
+          <p:cNvPr id="32" name="!!blk14"/>
           <p:cNvSpPr/>
           <p:nvPr/>
         </p:nvSpPr>
@@ -6287,7 +6209,7 @@
       </p:sp>
       <p:sp>
         <p:nvSpPr>
-          <p:cNvPr id="34" name="!!tag14"/>
+          <p:cNvPr id="33" name="!!tag14"/>
           <p:cNvSpPr txBox="1"/>
           <p:nvPr/>
         </p:nvSpPr>
@@ -6326,7 +6248,7 @@
       </p:sp>
       <p:sp>
         <p:nvSpPr>
-          <p:cNvPr id="35" name="!!blk15"/>
+          <p:cNvPr id="34" name="!!blk15"/>
           <p:cNvSpPr/>
           <p:nvPr/>
         </p:nvSpPr>
@@ -6374,7 +6296,7 @@
       </p:sp>
       <p:sp>
         <p:nvSpPr>
-          <p:cNvPr id="36" name="!!tag15"/>
+          <p:cNvPr id="35" name="!!tag15"/>
           <p:cNvSpPr txBox="1"/>
           <p:nvPr/>
         </p:nvSpPr>
@@ -6413,7 +6335,7 @@
       </p:sp>
       <p:sp>
         <p:nvSpPr>
-          <p:cNvPr id="37" name="!!blk16"/>
+          <p:cNvPr id="36" name="!!blk16"/>
           <p:cNvSpPr/>
           <p:nvPr/>
         </p:nvSpPr>
@@ -6461,7 +6383,7 @@
       </p:sp>
       <p:sp>
         <p:nvSpPr>
-          <p:cNvPr id="38" name="!!tag16"/>
+          <p:cNvPr id="37" name="!!tag16"/>
           <p:cNvSpPr txBox="1"/>
           <p:nvPr/>
         </p:nvSpPr>
@@ -6500,7 +6422,7 @@
       </p:sp>
       <p:sp>
         <p:nvSpPr>
-          <p:cNvPr id="39" name="Text 37"/>
+          <p:cNvPr id="38" name="Text 36"/>
           <p:cNvSpPr txBox="1"/>
           <p:nvPr/>
         </p:nvSpPr>
@@ -6539,7 +6461,7 @@
       </p:sp>
       <p:sp>
         <p:nvSpPr>
-          <p:cNvPr id="40" name="Text 38"/>
+          <p:cNvPr id="39" name="Text 37"/>
           <p:cNvSpPr/>
           <p:nvPr/>
         </p:nvSpPr>
@@ -6576,7 +6498,7 @@
       </p:sp>
       <p:sp>
         <p:nvSpPr>
-          <p:cNvPr id="41" name="Text 39"/>
+          <p:cNvPr id="40" name="Text 38"/>
           <p:cNvSpPr txBox="1"/>
           <p:nvPr/>
         </p:nvSpPr>
@@ -6629,7 +6551,7 @@
       </p:sp>
       <p:sp>
         <p:nvSpPr>
-          <p:cNvPr id="42" name="Text 40"/>
+          <p:cNvPr id="41" name="Text 39"/>
           <p:cNvSpPr/>
           <p:nvPr/>
         </p:nvSpPr>
@@ -6666,7 +6588,7 @@
       </p:sp>
       <p:sp>
         <p:nvSpPr>
-          <p:cNvPr id="43" name="Text 41"/>
+          <p:cNvPr id="42" name="Text 40"/>
           <p:cNvSpPr txBox="1"/>
           <p:nvPr/>
         </p:nvSpPr>
@@ -6719,7 +6641,7 @@
       </p:sp>
       <p:sp>
         <p:nvSpPr>
-          <p:cNvPr id="44" name="Text 42"/>
+          <p:cNvPr id="43" name="Text 41"/>
           <p:cNvSpPr/>
           <p:nvPr/>
         </p:nvSpPr>
@@ -6756,7 +6678,7 @@
       </p:sp>
       <p:sp>
         <p:nvSpPr>
-          <p:cNvPr id="45" name="Text 43"/>
+          <p:cNvPr id="44" name="Text 42"/>
           <p:cNvSpPr txBox="1"/>
           <p:nvPr/>
         </p:nvSpPr>
@@ -6809,7 +6731,7 @@
       </p:sp>
       <p:sp>
         <p:nvSpPr>
-          <p:cNvPr id="46" name="Text 44"/>
+          <p:cNvPr id="45" name="Text 43"/>
           <p:cNvSpPr txBox="1"/>
           <p:nvPr/>
         </p:nvSpPr>
@@ -7055,46 +6977,7 @@
       </p:sp>
       <p:sp>
         <p:nvSpPr>
-          <p:cNvPr id="5" name="!!restricted"/>
-          <p:cNvSpPr txBox="1"/>
-          <p:nvPr/>
-        </p:nvSpPr>
-        <p:spPr>
-          <a:xfrm>
-            <a:off x="5184648" y="6556248"/>
-            <a:ext cx="1828800" cy="201168"/>
-          </a:xfrm>
-          <a:prstGeom prst="rect">
-            <a:avLst/>
-          </a:prstGeom>
-          <a:noFill/>
-          <a:ln/>
-        </p:spPr>
-        <p:txBody>
-          <a:bodyPr wrap="square" lIns="0" tIns="0" rIns="0" bIns="0" rtlCol="0" anchor="ctr"/>
-          <a:lstStyle/>
-          <a:p>
-            <a:pPr algn="ctr" indent="0" marL="0">
-              <a:buNone/>
-            </a:pPr>
-            <a:r>
-              <a:rPr lang="en-US" sz="800" dirty="0">
-                <a:solidFill>
-                  <a:srgbClr val="7F7F7F"/>
-                </a:solidFill>
-                <a:latin typeface="Arial" pitchFamily="34" charset="0"/>
-                <a:ea typeface="Arial" pitchFamily="34" charset="-122"/>
-                <a:cs typeface="Arial" pitchFamily="34" charset="-120"/>
-              </a:rPr>
-              <a:t>RESTRICTED</a:t>
-            </a:r>
-            <a:endParaRPr lang="en-US" sz="800" dirty="0"/>
-          </a:p>
-        </p:txBody>
-      </p:sp>
-      <p:sp>
-        <p:nvSpPr>
-          <p:cNvPr id="6" name="!!lh0"/>
+          <p:cNvPr id="5" name="!!lh0"/>
           <p:cNvSpPr txBox="1"/>
           <p:nvPr/>
         </p:nvSpPr>
@@ -7133,7 +7016,7 @@
       </p:sp>
       <p:sp>
         <p:nvSpPr>
-          <p:cNvPr id="7" name="!!lh1"/>
+          <p:cNvPr id="6" name="!!lh1"/>
           <p:cNvSpPr txBox="1"/>
           <p:nvPr/>
         </p:nvSpPr>
@@ -7172,7 +7055,7 @@
       </p:sp>
       <p:sp>
         <p:nvSpPr>
-          <p:cNvPr id="8" name="!!lh2"/>
+          <p:cNvPr id="7" name="!!lh2"/>
           <p:cNvSpPr txBox="1"/>
           <p:nvPr/>
         </p:nvSpPr>
@@ -7211,7 +7094,7 @@
       </p:sp>
       <p:sp>
         <p:nvSpPr>
-          <p:cNvPr id="9" name="!!blk01"/>
+          <p:cNvPr id="8" name="!!blk01"/>
           <p:cNvSpPr/>
           <p:nvPr/>
         </p:nvSpPr>
@@ -7259,7 +7142,7 @@
       </p:sp>
       <p:sp>
         <p:nvSpPr>
-          <p:cNvPr id="10" name="!!blk02"/>
+          <p:cNvPr id="9" name="!!blk02"/>
           <p:cNvSpPr/>
           <p:nvPr/>
         </p:nvSpPr>
@@ -7307,7 +7190,7 @@
       </p:sp>
       <p:sp>
         <p:nvSpPr>
-          <p:cNvPr id="11" name="!!blk03"/>
+          <p:cNvPr id="10" name="!!blk03"/>
           <p:cNvSpPr/>
           <p:nvPr/>
         </p:nvSpPr>
@@ -7355,7 +7238,7 @@
       </p:sp>
       <p:sp>
         <p:nvSpPr>
-          <p:cNvPr id="12" name="!!blk04"/>
+          <p:cNvPr id="11" name="!!blk04"/>
           <p:cNvSpPr/>
           <p:nvPr/>
         </p:nvSpPr>
@@ -7403,7 +7286,7 @@
       </p:sp>
       <p:sp>
         <p:nvSpPr>
-          <p:cNvPr id="13" name="!!blk05"/>
+          <p:cNvPr id="12" name="!!blk05"/>
           <p:cNvSpPr/>
           <p:nvPr/>
         </p:nvSpPr>
@@ -7451,7 +7334,7 @@
       </p:sp>
       <p:sp>
         <p:nvSpPr>
-          <p:cNvPr id="14" name="!!blk06"/>
+          <p:cNvPr id="13" name="!!blk06"/>
           <p:cNvSpPr/>
           <p:nvPr/>
         </p:nvSpPr>
@@ -7499,7 +7382,7 @@
       </p:sp>
       <p:sp>
         <p:nvSpPr>
-          <p:cNvPr id="15" name="!!blk07"/>
+          <p:cNvPr id="14" name="!!blk07"/>
           <p:cNvSpPr/>
           <p:nvPr/>
         </p:nvSpPr>
@@ -7547,7 +7430,7 @@
       </p:sp>
       <p:sp>
         <p:nvSpPr>
-          <p:cNvPr id="16" name="!!blk08"/>
+          <p:cNvPr id="15" name="!!blk08"/>
           <p:cNvSpPr/>
           <p:nvPr/>
         </p:nvSpPr>
@@ -7595,7 +7478,7 @@
       </p:sp>
       <p:sp>
         <p:nvSpPr>
-          <p:cNvPr id="17" name="!!blk09"/>
+          <p:cNvPr id="16" name="!!blk09"/>
           <p:cNvSpPr/>
           <p:nvPr/>
         </p:nvSpPr>
@@ -7643,7 +7526,7 @@
       </p:sp>
       <p:sp>
         <p:nvSpPr>
-          <p:cNvPr id="18" name="!!blk10"/>
+          <p:cNvPr id="17" name="!!blk10"/>
           <p:cNvSpPr/>
           <p:nvPr/>
         </p:nvSpPr>
@@ -7691,7 +7574,7 @@
       </p:sp>
       <p:sp>
         <p:nvSpPr>
-          <p:cNvPr id="19" name="!!blk11"/>
+          <p:cNvPr id="18" name="!!blk11"/>
           <p:cNvSpPr/>
           <p:nvPr/>
         </p:nvSpPr>
@@ -7739,7 +7622,7 @@
       </p:sp>
       <p:sp>
         <p:nvSpPr>
-          <p:cNvPr id="20" name="!!blk12"/>
+          <p:cNvPr id="19" name="!!blk12"/>
           <p:cNvSpPr/>
           <p:nvPr/>
         </p:nvSpPr>
@@ -7787,7 +7670,7 @@
       </p:sp>
       <p:sp>
         <p:nvSpPr>
-          <p:cNvPr id="21" name="!!blk13"/>
+          <p:cNvPr id="20" name="!!blk13"/>
           <p:cNvSpPr/>
           <p:nvPr/>
         </p:nvSpPr>
@@ -7835,7 +7718,7 @@
       </p:sp>
       <p:sp>
         <p:nvSpPr>
-          <p:cNvPr id="22" name="!!blk14"/>
+          <p:cNvPr id="21" name="!!blk14"/>
           <p:cNvSpPr/>
           <p:nvPr/>
         </p:nvSpPr>
@@ -7883,7 +7766,7 @@
       </p:sp>
       <p:sp>
         <p:nvSpPr>
-          <p:cNvPr id="23" name="!!blk15"/>
+          <p:cNvPr id="22" name="!!blk15"/>
           <p:cNvSpPr/>
           <p:nvPr/>
         </p:nvSpPr>
@@ -7931,7 +7814,7 @@
       </p:sp>
       <p:sp>
         <p:nvSpPr>
-          <p:cNvPr id="24" name="!!blk16"/>
+          <p:cNvPr id="23" name="!!blk16"/>
           <p:cNvSpPr/>
           <p:nvPr/>
         </p:nvSpPr>
@@ -7979,7 +7862,7 @@
       </p:sp>
       <p:sp>
         <p:nvSpPr>
-          <p:cNvPr id="25" name="Text 23"/>
+          <p:cNvPr id="24" name="Text 22"/>
           <p:cNvSpPr txBox="1"/>
           <p:nvPr/>
         </p:nvSpPr>
@@ -8018,7 +7901,7 @@
       </p:sp>
       <p:sp>
         <p:nvSpPr>
-          <p:cNvPr id="26" name="Text 24"/>
+          <p:cNvPr id="25" name="Text 23"/>
           <p:cNvSpPr/>
           <p:nvPr/>
         </p:nvSpPr>
@@ -8055,7 +7938,7 @@
       </p:sp>
       <p:sp>
         <p:nvSpPr>
-          <p:cNvPr id="27" name="Text 25"/>
+          <p:cNvPr id="26" name="Text 24"/>
           <p:cNvSpPr txBox="1"/>
           <p:nvPr/>
         </p:nvSpPr>
@@ -8108,7 +7991,7 @@
       </p:sp>
       <p:sp>
         <p:nvSpPr>
-          <p:cNvPr id="28" name="Text 26"/>
+          <p:cNvPr id="27" name="Text 25"/>
           <p:cNvSpPr/>
           <p:nvPr/>
         </p:nvSpPr>
@@ -8145,7 +8028,7 @@
       </p:sp>
       <p:sp>
         <p:nvSpPr>
-          <p:cNvPr id="29" name="Text 27"/>
+          <p:cNvPr id="28" name="Text 26"/>
           <p:cNvSpPr txBox="1"/>
           <p:nvPr/>
         </p:nvSpPr>
@@ -8198,7 +8081,7 @@
       </p:sp>
       <p:sp>
         <p:nvSpPr>
-          <p:cNvPr id="30" name="Text 28"/>
+          <p:cNvPr id="29" name="Text 27"/>
           <p:cNvSpPr/>
           <p:nvPr/>
         </p:nvSpPr>
@@ -8235,7 +8118,7 @@
       </p:sp>
       <p:sp>
         <p:nvSpPr>
-          <p:cNvPr id="31" name="Text 29"/>
+          <p:cNvPr id="30" name="Text 28"/>
           <p:cNvSpPr txBox="1"/>
           <p:nvPr/>
         </p:nvSpPr>
@@ -8288,7 +8171,7 @@
       </p:sp>
       <p:sp>
         <p:nvSpPr>
-          <p:cNvPr id="32" name="Text 30"/>
+          <p:cNvPr id="31" name="Text 29"/>
           <p:cNvSpPr txBox="1"/>
           <p:nvPr/>
         </p:nvSpPr>
@@ -8341,7 +8224,7 @@
       </p:sp>
       <p:sp>
         <p:nvSpPr>
-          <p:cNvPr id="33" name="!!take3"/>
+          <p:cNvPr id="32" name="!!take3"/>
           <p:cNvSpPr/>
           <p:nvPr/>
         </p:nvSpPr>
@@ -8580,48 +8463,9 @@
           </a:p>
         </p:txBody>
       </p:sp>
-      <p:sp>
-        <p:nvSpPr>
-          <p:cNvPr id="5" name="!!restricted"/>
-          <p:cNvSpPr txBox="1"/>
-          <p:nvPr/>
-        </p:nvSpPr>
-        <p:spPr>
-          <a:xfrm>
-            <a:off x="5184648" y="6556248"/>
-            <a:ext cx="1828800" cy="201168"/>
-          </a:xfrm>
-          <a:prstGeom prst="rect">
-            <a:avLst/>
-          </a:prstGeom>
-          <a:noFill/>
-          <a:ln/>
-        </p:spPr>
-        <p:txBody>
-          <a:bodyPr wrap="square" lIns="0" tIns="0" rIns="0" bIns="0" rtlCol="0" anchor="ctr"/>
-          <a:lstStyle/>
-          <a:p>
-            <a:pPr algn="ctr" indent="0" marL="0">
-              <a:buNone/>
-            </a:pPr>
-            <a:r>
-              <a:rPr lang="en-US" sz="800" dirty="0">
-                <a:solidFill>
-                  <a:srgbClr val="7F7F7F"/>
-                </a:solidFill>
-                <a:latin typeface="Arial" pitchFamily="34" charset="0"/>
-                <a:ea typeface="Arial" pitchFamily="34" charset="-122"/>
-                <a:cs typeface="Arial" pitchFamily="34" charset="-120"/>
-              </a:rPr>
-              <a:t>RESTRICTED</a:t>
-            </a:r>
-            <a:endParaRPr lang="en-US" sz="800" dirty="0"/>
-          </a:p>
-        </p:txBody>
-      </p:sp>
       <p:pic>
         <p:nvPicPr>
-          <p:cNvPr id="6" name="!!fi0" descr="/tmp/deck-icons/TbBrain_534AB7.png">    </p:cNvPr>
+          <p:cNvPr id="5" name="!!fi0" descr="/tmp/deck-icons/TbBrain_534AB7.png">    </p:cNvPr>
           <p:cNvPicPr>
             <a:picLocks noChangeAspect="1"/>
           </p:cNvPicPr>
@@ -8645,7 +8489,7 @@
       </p:pic>
       <p:sp>
         <p:nvSpPr>
-          <p:cNvPr id="7" name="!!fh0"/>
+          <p:cNvPr id="6" name="!!fh0"/>
           <p:cNvSpPr txBox="1"/>
           <p:nvPr/>
         </p:nvSpPr>
@@ -8684,7 +8528,7 @@
       </p:sp>
       <p:sp>
         <p:nvSpPr>
-          <p:cNvPr id="8" name="!!card00"/>
+          <p:cNvPr id="7" name="!!card00"/>
           <p:cNvSpPr/>
           <p:nvPr/>
         </p:nvSpPr>
@@ -8721,7 +8565,7 @@
       </p:sp>
       <p:pic>
         <p:nvPicPr>
-          <p:cNvPr id="9" name="!!ci00" descr="/tmp/deck-icons/TbRouteOff_534AB7.png">    </p:cNvPr>
+          <p:cNvPr id="8" name="!!ci00" descr="/tmp/deck-icons/TbRouteOff_534AB7.png">    </p:cNvPr>
           <p:cNvPicPr>
             <a:picLocks noChangeAspect="1"/>
           </p:cNvPicPr>
@@ -8745,7 +8589,7 @@
       </p:pic>
       <p:sp>
         <p:nvSpPr>
-          <p:cNvPr id="10" name="!!cn00"/>
+          <p:cNvPr id="9" name="!!cn00"/>
           <p:cNvSpPr txBox="1"/>
           <p:nvPr/>
         </p:nvSpPr>
@@ -8784,7 +8628,7 @@
       </p:sp>
       <p:sp>
         <p:nvSpPr>
-          <p:cNvPr id="11" name="!!cb00"/>
+          <p:cNvPr id="10" name="!!cb00"/>
           <p:cNvSpPr txBox="1"/>
           <p:nvPr/>
         </p:nvSpPr>
@@ -8917,7 +8761,7 @@
       </p:sp>
       <p:sp>
         <p:nvSpPr>
-          <p:cNvPr id="12" name="!!card01"/>
+          <p:cNvPr id="11" name="!!card01"/>
           <p:cNvSpPr/>
           <p:nvPr/>
         </p:nvSpPr>
@@ -8954,7 +8798,7 @@
       </p:sp>
       <p:pic>
         <p:nvPicPr>
-          <p:cNvPr id="13" name="!!ci01" descr="/tmp/deck-icons/TbTool_534AB7.png">    </p:cNvPr>
+          <p:cNvPr id="12" name="!!ci01" descr="/tmp/deck-icons/TbTool_534AB7.png">    </p:cNvPr>
           <p:cNvPicPr>
             <a:picLocks noChangeAspect="1"/>
           </p:cNvPicPr>
@@ -8978,7 +8822,7 @@
       </p:pic>
       <p:sp>
         <p:nvSpPr>
-          <p:cNvPr id="14" name="!!cn01"/>
+          <p:cNvPr id="13" name="!!cn01"/>
           <p:cNvSpPr txBox="1"/>
           <p:nvPr/>
         </p:nvSpPr>
@@ -9017,7 +8861,7 @@
       </p:sp>
       <p:sp>
         <p:nvSpPr>
-          <p:cNvPr id="15" name="!!cb01"/>
+          <p:cNvPr id="14" name="!!cb01"/>
           <p:cNvSpPr txBox="1"/>
           <p:nvPr/>
         </p:nvSpPr>
@@ -9150,7 +8994,7 @@
       </p:sp>
       <p:pic>
         <p:nvPicPr>
-          <p:cNvPr id="16" name="!!fi1" descr="/tmp/deck-icons/TbPlayerPlay_0F6E56.png">    </p:cNvPr>
+          <p:cNvPr id="15" name="!!fi1" descr="/tmp/deck-icons/TbPlayerPlay_0F6E56.png">    </p:cNvPr>
           <p:cNvPicPr>
             <a:picLocks noChangeAspect="1"/>
           </p:cNvPicPr>
@@ -9174,7 +9018,7 @@
       </p:pic>
       <p:sp>
         <p:nvSpPr>
-          <p:cNvPr id="17" name="!!fh1"/>
+          <p:cNvPr id="16" name="!!fh1"/>
           <p:cNvSpPr txBox="1"/>
           <p:nvPr/>
         </p:nvSpPr>
@@ -9213,7 +9057,7 @@
       </p:sp>
       <p:sp>
         <p:nvSpPr>
-          <p:cNvPr id="18" name="!!card10"/>
+          <p:cNvPr id="17" name="!!card10"/>
           <p:cNvSpPr/>
           <p:nvPr/>
         </p:nvSpPr>
@@ -9250,7 +9094,7 @@
       </p:sp>
       <p:pic>
         <p:nvPicPr>
-          <p:cNvPr id="19" name="!!ci10" descr="/tmp/deck-icons/TbRepeat_0F6E56.png">    </p:cNvPr>
+          <p:cNvPr id="18" name="!!ci10" descr="/tmp/deck-icons/TbRepeat_0F6E56.png">    </p:cNvPr>
           <p:cNvPicPr>
             <a:picLocks noChangeAspect="1"/>
           </p:cNvPicPr>
@@ -9274,7 +9118,7 @@
       </p:pic>
       <p:sp>
         <p:nvSpPr>
-          <p:cNvPr id="20" name="!!cn10"/>
+          <p:cNvPr id="19" name="!!cn10"/>
           <p:cNvSpPr txBox="1"/>
           <p:nvPr/>
         </p:nvSpPr>
@@ -9313,7 +9157,7 @@
       </p:sp>
       <p:sp>
         <p:nvSpPr>
-          <p:cNvPr id="21" name="!!cb10"/>
+          <p:cNvPr id="20" name="!!cb10"/>
           <p:cNvSpPr txBox="1"/>
           <p:nvPr/>
         </p:nvSpPr>
@@ -9446,7 +9290,7 @@
       </p:sp>
       <p:sp>
         <p:nvSpPr>
-          <p:cNvPr id="22" name="!!card11"/>
+          <p:cNvPr id="21" name="!!card11"/>
           <p:cNvSpPr/>
           <p:nvPr/>
         </p:nvSpPr>
@@ -9483,7 +9327,7 @@
       </p:sp>
       <p:pic>
         <p:nvPicPr>
-          <p:cNvPr id="23" name="!!ci11" descr="/tmp/deck-icons/TbStack2_0F6E56.png">    </p:cNvPr>
+          <p:cNvPr id="22" name="!!ci11" descr="/tmp/deck-icons/TbStack2_0F6E56.png">    </p:cNvPr>
           <p:cNvPicPr>
             <a:picLocks noChangeAspect="1"/>
           </p:cNvPicPr>
@@ -9507,7 +9351,7 @@
       </p:pic>
       <p:sp>
         <p:nvSpPr>
-          <p:cNvPr id="24" name="!!cn11"/>
+          <p:cNvPr id="23" name="!!cn11"/>
           <p:cNvSpPr txBox="1"/>
           <p:nvPr/>
         </p:nvSpPr>
@@ -9546,7 +9390,7 @@
       </p:sp>
       <p:sp>
         <p:nvSpPr>
-          <p:cNvPr id="25" name="!!cb11"/>
+          <p:cNvPr id="24" name="!!cb11"/>
           <p:cNvSpPr txBox="1"/>
           <p:nvPr/>
         </p:nvSpPr>
@@ -9679,7 +9523,7 @@
       </p:sp>
       <p:pic>
         <p:nvPicPr>
-          <p:cNvPr id="26" name="!!fi2" descr="/tmp/deck-icons/TbChecklist_993C1D.png">    </p:cNvPr>
+          <p:cNvPr id="25" name="!!fi2" descr="/tmp/deck-icons/TbChecklist_993C1D.png">    </p:cNvPr>
           <p:cNvPicPr>
             <a:picLocks noChangeAspect="1"/>
           </p:cNvPicPr>
@@ -9703,7 +9547,7 @@
       </p:pic>
       <p:sp>
         <p:nvSpPr>
-          <p:cNvPr id="27" name="!!fh2"/>
+          <p:cNvPr id="26" name="!!fh2"/>
           <p:cNvSpPr txBox="1"/>
           <p:nvPr/>
         </p:nvSpPr>
@@ -9742,7 +9586,7 @@
       </p:sp>
       <p:sp>
         <p:nvSpPr>
-          <p:cNvPr id="28" name="!!card20"/>
+          <p:cNvPr id="27" name="!!card20"/>
           <p:cNvSpPr/>
           <p:nvPr/>
         </p:nvSpPr>
@@ -9779,7 +9623,7 @@
       </p:sp>
       <p:pic>
         <p:nvPicPr>
-          <p:cNvPr id="29" name="!!ci20" descr="/tmp/deck-icons/TbMoodCheck_993C1D.png">    </p:cNvPr>
+          <p:cNvPr id="28" name="!!ci20" descr="/tmp/deck-icons/TbMoodCheck_993C1D.png">    </p:cNvPr>
           <p:cNvPicPr>
             <a:picLocks noChangeAspect="1"/>
           </p:cNvPicPr>
@@ -9803,7 +9647,7 @@
       </p:pic>
       <p:sp>
         <p:nvSpPr>
-          <p:cNvPr id="30" name="!!cn20"/>
+          <p:cNvPr id="29" name="!!cn20"/>
           <p:cNvSpPr txBox="1"/>
           <p:nvPr/>
         </p:nvSpPr>
@@ -9842,7 +9686,7 @@
       </p:sp>
       <p:sp>
         <p:nvSpPr>
-          <p:cNvPr id="31" name="!!cb20"/>
+          <p:cNvPr id="30" name="!!cb20"/>
           <p:cNvSpPr txBox="1"/>
           <p:nvPr/>
         </p:nvSpPr>
@@ -9975,7 +9819,7 @@
       </p:sp>
       <p:sp>
         <p:nvSpPr>
-          <p:cNvPr id="32" name="!!card21"/>
+          <p:cNvPr id="31" name="!!card21"/>
           <p:cNvSpPr/>
           <p:nvPr/>
         </p:nvSpPr>
@@ -10012,7 +9856,7 @@
       </p:sp>
       <p:pic>
         <p:nvPicPr>
-          <p:cNvPr id="33" name="!!ci21" descr="/tmp/deck-icons/TbPlayerStop_993C1D.png">    </p:cNvPr>
+          <p:cNvPr id="32" name="!!ci21" descr="/tmp/deck-icons/TbPlayerStop_993C1D.png">    </p:cNvPr>
           <p:cNvPicPr>
             <a:picLocks noChangeAspect="1"/>
           </p:cNvPicPr>
@@ -10036,7 +9880,7 @@
       </p:pic>
       <p:sp>
         <p:nvSpPr>
-          <p:cNvPr id="34" name="!!cn21"/>
+          <p:cNvPr id="33" name="!!cn21"/>
           <p:cNvSpPr txBox="1"/>
           <p:nvPr/>
         </p:nvSpPr>
@@ -10075,7 +9919,7 @@
       </p:sp>
       <p:sp>
         <p:nvSpPr>
-          <p:cNvPr id="35" name="!!cb21"/>
+          <p:cNvPr id="34" name="!!cb21"/>
           <p:cNvSpPr txBox="1"/>
           <p:nvPr/>
         </p:nvSpPr>
@@ -10208,7 +10052,7 @@
       </p:sp>
       <p:sp>
         <p:nvSpPr>
-          <p:cNvPr id="36" name="!!take4"/>
+          <p:cNvPr id="35" name="!!take4"/>
           <p:cNvSpPr txBox="1"/>
           <p:nvPr/>
         </p:nvSpPr>
@@ -10335,7 +10179,7 @@
                                           </p:stCondLst>
                                         </p:cTn>
                                         <p:tgtEl>
-                                          <p:spTgt spid="16"/>
+                                          <p:spTgt spid="15"/>
                                         </p:tgtEl>
                                         <p:attrNameLst>
                                           <p:attrName>style.visibility</p:attrName>
@@ -10349,7 +10193,7 @@
                                       <p:cBhvr>
                                         <p:cTn id="7" dur="500"/>
                                         <p:tgtEl>
-                                          <p:spTgt spid="16"/>
+                                          <p:spTgt spid="15"/>
                                         </p:tgtEl>
                                       </p:cBhvr>
                                     </p:animEffect>
@@ -10370,7 +10214,7 @@
                                           </p:stCondLst>
                                         </p:cTn>
                                         <p:tgtEl>
-                                          <p:spTgt spid="17"/>
+                                          <p:spTgt spid="16"/>
                                         </p:tgtEl>
                                         <p:attrNameLst>
                                           <p:attrName>style.visibility</p:attrName>
@@ -10384,7 +10228,7 @@
                                       <p:cBhvr>
                                         <p:cTn id="10" dur="500"/>
                                         <p:tgtEl>
-                                          <p:spTgt spid="17"/>
+                                          <p:spTgt spid="16"/>
                                         </p:tgtEl>
                                       </p:cBhvr>
                                     </p:animEffect>
@@ -10405,7 +10249,7 @@
                                           </p:stCondLst>
                                         </p:cTn>
                                         <p:tgtEl>
-                                          <p:spTgt spid="18"/>
+                                          <p:spTgt spid="17"/>
                                         </p:tgtEl>
                                         <p:attrNameLst>
                                           <p:attrName>style.visibility</p:attrName>
@@ -10419,7 +10263,7 @@
                                       <p:cBhvr>
                                         <p:cTn id="13" dur="500"/>
                                         <p:tgtEl>
-                                          <p:spTgt spid="18"/>
+                                          <p:spTgt spid="17"/>
                                         </p:tgtEl>
                                       </p:cBhvr>
                                     </p:animEffect>
@@ -10440,7 +10284,7 @@
                                           </p:stCondLst>
                                         </p:cTn>
                                         <p:tgtEl>
-                                          <p:spTgt spid="19"/>
+                                          <p:spTgt spid="18"/>
                                         </p:tgtEl>
                                         <p:attrNameLst>
                                           <p:attrName>style.visibility</p:attrName>
@@ -10454,7 +10298,7 @@
                                       <p:cBhvr>
                                         <p:cTn id="16" dur="500"/>
                                         <p:tgtEl>
-                                          <p:spTgt spid="19"/>
+                                          <p:spTgt spid="18"/>
                                         </p:tgtEl>
                                       </p:cBhvr>
                                     </p:animEffect>
@@ -10475,7 +10319,7 @@
                                           </p:stCondLst>
                                         </p:cTn>
                                         <p:tgtEl>
-                                          <p:spTgt spid="20"/>
+                                          <p:spTgt spid="19"/>
                                         </p:tgtEl>
                                         <p:attrNameLst>
                                           <p:attrName>style.visibility</p:attrName>
@@ -10489,7 +10333,7 @@
                                       <p:cBhvr>
                                         <p:cTn id="19" dur="500"/>
                                         <p:tgtEl>
-                                          <p:spTgt spid="20"/>
+                                          <p:spTgt spid="19"/>
                                         </p:tgtEl>
                                       </p:cBhvr>
                                     </p:animEffect>
@@ -10510,7 +10354,7 @@
                                           </p:stCondLst>
                                         </p:cTn>
                                         <p:tgtEl>
-                                          <p:spTgt spid="21"/>
+                                          <p:spTgt spid="20"/>
                                         </p:tgtEl>
                                         <p:attrNameLst>
                                           <p:attrName>style.visibility</p:attrName>
@@ -10524,7 +10368,7 @@
                                       <p:cBhvr>
                                         <p:cTn id="22" dur="500"/>
                                         <p:tgtEl>
-                                          <p:spTgt spid="21"/>
+                                          <p:spTgt spid="20"/>
                                         </p:tgtEl>
                                       </p:cBhvr>
                                     </p:animEffect>
@@ -10545,7 +10389,7 @@
                                           </p:stCondLst>
                                         </p:cTn>
                                         <p:tgtEl>
-                                          <p:spTgt spid="22"/>
+                                          <p:spTgt spid="21"/>
                                         </p:tgtEl>
                                         <p:attrNameLst>
                                           <p:attrName>style.visibility</p:attrName>
@@ -10559,7 +10403,7 @@
                                       <p:cBhvr>
                                         <p:cTn id="25" dur="500"/>
                                         <p:tgtEl>
-                                          <p:spTgt spid="22"/>
+                                          <p:spTgt spid="21"/>
                                         </p:tgtEl>
                                       </p:cBhvr>
                                     </p:animEffect>
@@ -10580,7 +10424,7 @@
                                           </p:stCondLst>
                                         </p:cTn>
                                         <p:tgtEl>
-                                          <p:spTgt spid="23"/>
+                                          <p:spTgt spid="22"/>
                                         </p:tgtEl>
                                         <p:attrNameLst>
                                           <p:attrName>style.visibility</p:attrName>
@@ -10594,7 +10438,7 @@
                                       <p:cBhvr>
                                         <p:cTn id="28" dur="500"/>
                                         <p:tgtEl>
-                                          <p:spTgt spid="23"/>
+                                          <p:spTgt spid="22"/>
                                         </p:tgtEl>
                                       </p:cBhvr>
                                     </p:animEffect>
@@ -10615,7 +10459,7 @@
                                           </p:stCondLst>
                                         </p:cTn>
                                         <p:tgtEl>
-                                          <p:spTgt spid="24"/>
+                                          <p:spTgt spid="23"/>
                                         </p:tgtEl>
                                         <p:attrNameLst>
                                           <p:attrName>style.visibility</p:attrName>
@@ -10629,7 +10473,7 @@
                                       <p:cBhvr>
                                         <p:cTn id="31" dur="500"/>
                                         <p:tgtEl>
-                                          <p:spTgt spid="24"/>
+                                          <p:spTgt spid="23"/>
                                         </p:tgtEl>
                                       </p:cBhvr>
                                     </p:animEffect>
@@ -10650,7 +10494,7 @@
                                           </p:stCondLst>
                                         </p:cTn>
                                         <p:tgtEl>
-                                          <p:spTgt spid="25"/>
+                                          <p:spTgt spid="24"/>
                                         </p:tgtEl>
                                         <p:attrNameLst>
                                           <p:attrName>style.visibility</p:attrName>
@@ -10664,7 +10508,7 @@
                                       <p:cBhvr>
                                         <p:cTn id="34" dur="500"/>
                                         <p:tgtEl>
-                                          <p:spTgt spid="25"/>
+                                          <p:spTgt spid="24"/>
                                         </p:tgtEl>
                                       </p:cBhvr>
                                     </p:animEffect>
@@ -10703,7 +10547,7 @@
                                           </p:stCondLst>
                                         </p:cTn>
                                         <p:tgtEl>
-                                          <p:spTgt spid="26"/>
+                                          <p:spTgt spid="25"/>
                                         </p:tgtEl>
                                         <p:attrNameLst>
                                           <p:attrName>style.visibility</p:attrName>
@@ -10717,7 +10561,7 @@
                                       <p:cBhvr>
                                         <p:cTn id="39" dur="500"/>
                                         <p:tgtEl>
-                                          <p:spTgt spid="26"/>
+                                          <p:spTgt spid="25"/>
                                         </p:tgtEl>
                                       </p:cBhvr>
                                     </p:animEffect>
@@ -10738,7 +10582,7 @@
                                           </p:stCondLst>
                                         </p:cTn>
                                         <p:tgtEl>
-                                          <p:spTgt spid="27"/>
+                                          <p:spTgt spid="26"/>
                                         </p:tgtEl>
                                         <p:attrNameLst>
                                           <p:attrName>style.visibility</p:attrName>
@@ -10752,7 +10596,7 @@
                                       <p:cBhvr>
                                         <p:cTn id="42" dur="500"/>
                                         <p:tgtEl>
-                                          <p:spTgt spid="27"/>
+                                          <p:spTgt spid="26"/>
                                         </p:tgtEl>
                                       </p:cBhvr>
                                     </p:animEffect>
@@ -10773,7 +10617,7 @@
                                           </p:stCondLst>
                                         </p:cTn>
                                         <p:tgtEl>
-                                          <p:spTgt spid="28"/>
+                                          <p:spTgt spid="27"/>
                                         </p:tgtEl>
                                         <p:attrNameLst>
                                           <p:attrName>style.visibility</p:attrName>
@@ -10787,7 +10631,7 @@
                                       <p:cBhvr>
                                         <p:cTn id="45" dur="500"/>
                                         <p:tgtEl>
-                                          <p:spTgt spid="28"/>
+                                          <p:spTgt spid="27"/>
                                         </p:tgtEl>
                                       </p:cBhvr>
                                     </p:animEffect>
@@ -10808,7 +10652,7 @@
                                           </p:stCondLst>
                                         </p:cTn>
                                         <p:tgtEl>
-                                          <p:spTgt spid="29"/>
+                                          <p:spTgt spid="28"/>
                                         </p:tgtEl>
                                         <p:attrNameLst>
                                           <p:attrName>style.visibility</p:attrName>
@@ -10822,7 +10666,7 @@
                                       <p:cBhvr>
                                         <p:cTn id="48" dur="500"/>
                                         <p:tgtEl>
-                                          <p:spTgt spid="29"/>
+                                          <p:spTgt spid="28"/>
                                         </p:tgtEl>
                                       </p:cBhvr>
                                     </p:animEffect>
@@ -10843,7 +10687,7 @@
                                           </p:stCondLst>
                                         </p:cTn>
                                         <p:tgtEl>
-                                          <p:spTgt spid="30"/>
+                                          <p:spTgt spid="29"/>
                                         </p:tgtEl>
                                         <p:attrNameLst>
                                           <p:attrName>style.visibility</p:attrName>
@@ -10857,7 +10701,7 @@
                                       <p:cBhvr>
                                         <p:cTn id="51" dur="500"/>
                                         <p:tgtEl>
-                                          <p:spTgt spid="30"/>
+                                          <p:spTgt spid="29"/>
                                         </p:tgtEl>
                                       </p:cBhvr>
                                     </p:animEffect>
@@ -10878,7 +10722,7 @@
                                           </p:stCondLst>
                                         </p:cTn>
                                         <p:tgtEl>
-                                          <p:spTgt spid="31"/>
+                                          <p:spTgt spid="30"/>
                                         </p:tgtEl>
                                         <p:attrNameLst>
                                           <p:attrName>style.visibility</p:attrName>
@@ -10892,7 +10736,7 @@
                                       <p:cBhvr>
                                         <p:cTn id="54" dur="500"/>
                                         <p:tgtEl>
-                                          <p:spTgt spid="31"/>
+                                          <p:spTgt spid="30"/>
                                         </p:tgtEl>
                                       </p:cBhvr>
                                     </p:animEffect>
@@ -10913,7 +10757,7 @@
                                           </p:stCondLst>
                                         </p:cTn>
                                         <p:tgtEl>
-                                          <p:spTgt spid="32"/>
+                                          <p:spTgt spid="31"/>
                                         </p:tgtEl>
                                         <p:attrNameLst>
                                           <p:attrName>style.visibility</p:attrName>
@@ -10927,7 +10771,7 @@
                                       <p:cBhvr>
                                         <p:cTn id="57" dur="500"/>
                                         <p:tgtEl>
-                                          <p:spTgt spid="32"/>
+                                          <p:spTgt spid="31"/>
                                         </p:tgtEl>
                                       </p:cBhvr>
                                     </p:animEffect>
@@ -10948,7 +10792,7 @@
                                           </p:stCondLst>
                                         </p:cTn>
                                         <p:tgtEl>
-                                          <p:spTgt spid="33"/>
+                                          <p:spTgt spid="32"/>
                                         </p:tgtEl>
                                         <p:attrNameLst>
                                           <p:attrName>style.visibility</p:attrName>
@@ -10962,7 +10806,7 @@
                                       <p:cBhvr>
                                         <p:cTn id="60" dur="500"/>
                                         <p:tgtEl>
-                                          <p:spTgt spid="33"/>
+                                          <p:spTgt spid="32"/>
                                         </p:tgtEl>
                                       </p:cBhvr>
                                     </p:animEffect>
@@ -10983,7 +10827,7 @@
                                           </p:stCondLst>
                                         </p:cTn>
                                         <p:tgtEl>
-                                          <p:spTgt spid="34"/>
+                                          <p:spTgt spid="33"/>
                                         </p:tgtEl>
                                         <p:attrNameLst>
                                           <p:attrName>style.visibility</p:attrName>
@@ -10997,7 +10841,7 @@
                                       <p:cBhvr>
                                         <p:cTn id="63" dur="500"/>
                                         <p:tgtEl>
-                                          <p:spTgt spid="34"/>
+                                          <p:spTgt spid="33"/>
                                         </p:tgtEl>
                                       </p:cBhvr>
                                     </p:animEffect>
@@ -11018,7 +10862,7 @@
                                           </p:stCondLst>
                                         </p:cTn>
                                         <p:tgtEl>
-                                          <p:spTgt spid="35"/>
+                                          <p:spTgt spid="34"/>
                                         </p:tgtEl>
                                         <p:attrNameLst>
                                           <p:attrName>style.visibility</p:attrName>
@@ -11032,7 +10876,7 @@
                                       <p:cBhvr>
                                         <p:cTn id="66" dur="500"/>
                                         <p:tgtEl>
-                                          <p:spTgt spid="35"/>
+                                          <p:spTgt spid="34"/>
                                         </p:tgtEl>
                                       </p:cBhvr>
                                     </p:animEffect>
@@ -11053,7 +10897,7 @@
                                           </p:stCondLst>
                                         </p:cTn>
                                         <p:tgtEl>
-                                          <p:spTgt spid="36"/>
+                                          <p:spTgt spid="35"/>
                                         </p:tgtEl>
                                         <p:attrNameLst>
                                           <p:attrName>style.visibility</p:attrName>
@@ -11067,7 +10911,7 @@
                                       <p:cBhvr>
                                         <p:cTn id="69" dur="500"/>
                                         <p:tgtEl>
-                                          <p:spTgt spid="36"/>
+                                          <p:spTgt spid="35"/>
                                         </p:tgtEl>
                                       </p:cBhvr>
                                     </p:animEffect>
@@ -11102,21 +10946,21 @@
       </p:par>
     </p:tnLst>
     <p:bldLst>
+      <p:bldP spid="16" grpId="0" animBg="1"/>
       <p:bldP spid="17" grpId="0" animBg="1"/>
-      <p:bldP spid="18" grpId="0" animBg="1"/>
+      <p:bldP spid="19" grpId="0" animBg="1"/>
       <p:bldP spid="20" grpId="0" animBg="1"/>
       <p:bldP spid="21" grpId="0" animBg="1"/>
-      <p:bldP spid="22" grpId="0" animBg="1"/>
+      <p:bldP spid="23" grpId="0" animBg="1"/>
       <p:bldP spid="24" grpId="0" animBg="1"/>
-      <p:bldP spid="25" grpId="0" animBg="1"/>
+      <p:bldP spid="26" grpId="0" animBg="1"/>
       <p:bldP spid="27" grpId="0" animBg="1"/>
-      <p:bldP spid="28" grpId="0" animBg="1"/>
+      <p:bldP spid="29" grpId="0" animBg="1"/>
       <p:bldP spid="30" grpId="0" animBg="1"/>
       <p:bldP spid="31" grpId="0" animBg="1"/>
-      <p:bldP spid="32" grpId="0" animBg="1"/>
+      <p:bldP spid="33" grpId="0" animBg="1"/>
       <p:bldP spid="34" grpId="0" animBg="1"/>
       <p:bldP spid="35" grpId="0" animBg="1"/>
-      <p:bldP spid="36" grpId="0" animBg="1"/>
     </p:bldLst>
   </p:timing>
 </p:sld>
@@ -11249,46 +11093,7 @@
       </p:sp>
       <p:sp>
         <p:nvSpPr>
-          <p:cNvPr id="5" name="!!restricted"/>
-          <p:cNvSpPr txBox="1"/>
-          <p:nvPr/>
-        </p:nvSpPr>
-        <p:spPr>
-          <a:xfrm>
-            <a:off x="5184648" y="6556248"/>
-            <a:ext cx="1828800" cy="201168"/>
-          </a:xfrm>
-          <a:prstGeom prst="rect">
-            <a:avLst/>
-          </a:prstGeom>
-          <a:noFill/>
-          <a:ln/>
-        </p:spPr>
-        <p:txBody>
-          <a:bodyPr wrap="square" lIns="0" tIns="0" rIns="0" bIns="0" rtlCol="0" anchor="ctr"/>
-          <a:lstStyle/>
-          <a:p>
-            <a:pPr algn="ctr" indent="0" marL="0">
-              <a:buNone/>
-            </a:pPr>
-            <a:r>
-              <a:rPr lang="en-US" sz="800" dirty="0">
-                <a:solidFill>
-                  <a:srgbClr val="7F7F7F"/>
-                </a:solidFill>
-                <a:latin typeface="Arial" pitchFamily="34" charset="0"/>
-                <a:ea typeface="Arial" pitchFamily="34" charset="-122"/>
-                <a:cs typeface="Arial" pitchFamily="34" charset="-120"/>
-              </a:rPr>
-              <a:t>RESTRICTED</a:t>
-            </a:r>
-            <a:endParaRPr lang="en-US" sz="800" dirty="0"/>
-          </a:p>
-        </p:txBody>
-      </p:sp>
-      <p:sp>
-        <p:nvSpPr>
-          <p:cNvPr id="6" name="!!task"/>
+          <p:cNvPr id="5" name="!!task"/>
           <p:cNvSpPr/>
           <p:nvPr/>
         </p:nvSpPr>
@@ -11323,7 +11128,7 @@
       </p:sp>
       <p:pic>
         <p:nvPicPr>
-          <p:cNvPr id="7" name="!!taski" descr="/tmp/deck-icons/TbTicket_2C2C2A.png">    </p:cNvPr>
+          <p:cNvPr id="6" name="!!taski" descr="/tmp/deck-icons/TbTicket_2C2C2A.png">    </p:cNvPr>
           <p:cNvPicPr>
             <a:picLocks noChangeAspect="1"/>
           </p:cNvPicPr>
@@ -11347,7 +11152,7 @@
       </p:pic>
       <p:sp>
         <p:nvSpPr>
-          <p:cNvPr id="8" name="!!taskl"/>
+          <p:cNvPr id="7" name="!!taskl"/>
           <p:cNvSpPr txBox="1"/>
           <p:nvPr/>
         </p:nvSpPr>
@@ -11386,7 +11191,7 @@
       </p:sp>
       <p:sp>
         <p:nvSpPr>
-          <p:cNvPr id="9" name="!!big"/>
+          <p:cNvPr id="8" name="!!big"/>
           <p:cNvSpPr/>
           <p:nvPr/>
         </p:nvSpPr>
@@ -11423,7 +11228,7 @@
       </p:sp>
       <p:sp>
         <p:nvSpPr>
-          <p:cNvPr id="10" name="!!bigl"/>
+          <p:cNvPr id="9" name="!!bigl"/>
           <p:cNvSpPr txBox="1"/>
           <p:nvPr/>
         </p:nvSpPr>
@@ -11462,7 +11267,7 @@
       </p:sp>
       <p:sp>
         <p:nvSpPr>
-          <p:cNvPr id="11" name="!!lt0"/>
+          <p:cNvPr id="10" name="!!lt0"/>
           <p:cNvSpPr/>
           <p:nvPr/>
         </p:nvSpPr>
@@ -11486,7 +11291,7 @@
       </p:sp>
       <p:sp>
         <p:nvSpPr>
-          <p:cNvPr id="12" name="!!fr"/>
+          <p:cNvPr id="11" name="!!fr"/>
           <p:cNvSpPr/>
           <p:nvPr/>
         </p:nvSpPr>
@@ -11534,7 +11339,7 @@
       </p:sp>
       <p:sp>
         <p:nvSpPr>
-          <p:cNvPr id="13" name="!!j0"/>
+          <p:cNvPr id="12" name="!!j0"/>
           <p:cNvSpPr/>
           <p:nvPr/>
         </p:nvSpPr>
@@ -11569,7 +11374,7 @@
       </p:sp>
       <p:pic>
         <p:nvPicPr>
-          <p:cNvPr id="14" name="!!ji0" descr="/tmp/deck-icons/TbBrain_534AB7.png">    </p:cNvPr>
+          <p:cNvPr id="13" name="!!ji0" descr="/tmp/deck-icons/TbBrain_534AB7.png">    </p:cNvPr>
           <p:cNvPicPr>
             <a:picLocks noChangeAspect="1"/>
           </p:cNvPicPr>
@@ -11593,7 +11398,7 @@
       </p:pic>
       <p:sp>
         <p:nvSpPr>
-          <p:cNvPr id="15" name="!!j1"/>
+          <p:cNvPr id="14" name="!!j1"/>
           <p:cNvSpPr/>
           <p:nvPr/>
         </p:nvSpPr>
@@ -11628,7 +11433,7 @@
       </p:sp>
       <p:pic>
         <p:nvPicPr>
-          <p:cNvPr id="16" name="!!ji1" descr="/tmp/deck-icons/TbTool_0F6E56.png">    </p:cNvPr>
+          <p:cNvPr id="15" name="!!ji1" descr="/tmp/deck-icons/TbTool_0F6E56.png">    </p:cNvPr>
           <p:cNvPicPr>
             <a:picLocks noChangeAspect="1"/>
           </p:cNvPicPr>
@@ -11652,7 +11457,7 @@
       </p:pic>
       <p:sp>
         <p:nvSpPr>
-          <p:cNvPr id="17" name="!!j2"/>
+          <p:cNvPr id="16" name="!!j2"/>
           <p:cNvSpPr/>
           <p:nvPr/>
         </p:nvSpPr>
@@ -11687,7 +11492,7 @@
       </p:sp>
       <p:pic>
         <p:nvPicPr>
-          <p:cNvPr id="18" name="!!ji2" descr="/tmp/deck-icons/TbChecklist_993C1D.png">    </p:cNvPr>
+          <p:cNvPr id="17" name="!!ji2" descr="/tmp/deck-icons/TbChecklist_993C1D.png">    </p:cNvPr>
           <p:cNvPicPr>
             <a:picLocks noChangeAspect="1"/>
           </p:cNvPicPr>
@@ -11711,7 +11516,7 @@
       </p:pic>
       <p:sp>
         <p:nvSpPr>
-          <p:cNvPr id="19" name="!!shm"/>
+          <p:cNvPr id="18" name="!!shm"/>
           <p:cNvSpPr/>
           <p:nvPr/>
         </p:nvSpPr>
@@ -11759,7 +11564,7 @@
       </p:sp>
       <p:sp>
         <p:nvSpPr>
-          <p:cNvPr id="20" name="!!sm0"/>
+          <p:cNvPr id="19" name="!!sm0"/>
           <p:cNvSpPr/>
           <p:nvPr/>
         </p:nvSpPr>
@@ -11783,7 +11588,7 @@
       </p:sp>
       <p:sp>
         <p:nvSpPr>
-          <p:cNvPr id="21" name="!!pstep"/>
+          <p:cNvPr id="20" name="!!pstep"/>
           <p:cNvSpPr txBox="1"/>
           <p:nvPr/>
         </p:nvSpPr>
@@ -11822,7 +11627,7 @@
       </p:sp>
       <p:sp>
         <p:nvSpPr>
-          <p:cNvPr id="22" name="!!pname"/>
+          <p:cNvPr id="21" name="!!pname"/>
           <p:cNvSpPr txBox="1"/>
           <p:nvPr/>
         </p:nvSpPr>
@@ -11861,7 +11666,7 @@
       </p:sp>
       <p:sp>
         <p:nvSpPr>
-          <p:cNvPr id="23" name="!!pcap"/>
+          <p:cNvPr id="22" name="!!pcap"/>
           <p:cNvSpPr txBox="1"/>
           <p:nvPr/>
         </p:nvSpPr>
@@ -11900,7 +11705,7 @@
       </p:sp>
       <p:pic>
         <p:nvPicPr>
-          <p:cNvPr id="24" name="!!cki0" descr="/tmp/deck-icons/TbCircle_B4B2A9.png">    </p:cNvPr>
+          <p:cNvPr id="23" name="!!cki0" descr="/tmp/deck-icons/TbCircle_B4B2A9.png">    </p:cNvPr>
           <p:cNvPicPr>
             <a:picLocks noChangeAspect="1"/>
           </p:cNvPicPr>
@@ -11924,7 +11729,7 @@
       </p:pic>
       <p:sp>
         <p:nvSpPr>
-          <p:cNvPr id="25" name="!!ckt0"/>
+          <p:cNvPr id="24" name="!!ckt0"/>
           <p:cNvSpPr txBox="1"/>
           <p:nvPr/>
         </p:nvSpPr>
@@ -11963,7 +11768,7 @@
       </p:sp>
       <p:pic>
         <p:nvPicPr>
-          <p:cNvPr id="26" name="!!cki1" descr="/tmp/deck-icons/TbCircle_B4B2A9.png">    </p:cNvPr>
+          <p:cNvPr id="25" name="!!cki1" descr="/tmp/deck-icons/TbCircle_B4B2A9.png">    </p:cNvPr>
           <p:cNvPicPr>
             <a:picLocks noChangeAspect="1"/>
           </p:cNvPicPr>
@@ -11987,7 +11792,7 @@
       </p:pic>
       <p:sp>
         <p:nvSpPr>
-          <p:cNvPr id="27" name="!!ckt1"/>
+          <p:cNvPr id="26" name="!!ckt1"/>
           <p:cNvSpPr txBox="1"/>
           <p:nvPr/>
         </p:nvSpPr>
@@ -12026,7 +11831,7 @@
       </p:sp>
       <p:pic>
         <p:nvPicPr>
-          <p:cNvPr id="28" name="!!cki2" descr="/tmp/deck-icons/TbCircle_B4B2A9.png">    </p:cNvPr>
+          <p:cNvPr id="27" name="!!cki2" descr="/tmp/deck-icons/TbCircle_B4B2A9.png">    </p:cNvPr>
           <p:cNvPicPr>
             <a:picLocks noChangeAspect="1"/>
           </p:cNvPicPr>
@@ -12050,7 +11855,7 @@
       </p:pic>
       <p:sp>
         <p:nvSpPr>
-          <p:cNvPr id="29" name="!!ckt2"/>
+          <p:cNvPr id="28" name="!!ckt2"/>
           <p:cNvSpPr txBox="1"/>
           <p:nvPr/>
         </p:nvSpPr>
@@ -12089,7 +11894,7 @@
       </p:sp>
       <p:pic>
         <p:nvPicPr>
-          <p:cNvPr id="30" name="!!cki3" descr="/tmp/deck-icons/TbCircle_B4B2A9.png">    </p:cNvPr>
+          <p:cNvPr id="29" name="!!cki3" descr="/tmp/deck-icons/TbCircle_B4B2A9.png">    </p:cNvPr>
           <p:cNvPicPr>
             <a:picLocks noChangeAspect="1"/>
           </p:cNvPicPr>
@@ -12113,7 +11918,7 @@
       </p:pic>
       <p:sp>
         <p:nvSpPr>
-          <p:cNvPr id="31" name="!!ckt3"/>
+          <p:cNvPr id="30" name="!!ckt3"/>
           <p:cNvSpPr txBox="1"/>
           <p:nvPr/>
         </p:nvSpPr>
@@ -12152,7 +11957,7 @@
       </p:sp>
       <p:pic>
         <p:nvPicPr>
-          <p:cNvPr id="32" name="!!cki4" descr="/tmp/deck-icons/TbCircle_B4B2A9.png">    </p:cNvPr>
+          <p:cNvPr id="31" name="!!cki4" descr="/tmp/deck-icons/TbCircle_B4B2A9.png">    </p:cNvPr>
           <p:cNvPicPr>
             <a:picLocks noChangeAspect="1"/>
           </p:cNvPicPr>
@@ -12176,7 +11981,7 @@
       </p:pic>
       <p:sp>
         <p:nvSpPr>
-          <p:cNvPr id="33" name="!!ckt4"/>
+          <p:cNvPr id="32" name="!!ckt4"/>
           <p:cNvSpPr txBox="1"/>
           <p:nvPr/>
         </p:nvSpPr>
@@ -12408,46 +12213,7 @@
       </p:sp>
       <p:sp>
         <p:nvSpPr>
-          <p:cNvPr id="5" name="!!restricted"/>
-          <p:cNvSpPr txBox="1"/>
-          <p:nvPr/>
-        </p:nvSpPr>
-        <p:spPr>
-          <a:xfrm>
-            <a:off x="5184648" y="6556248"/>
-            <a:ext cx="1828800" cy="201168"/>
-          </a:xfrm>
-          <a:prstGeom prst="rect">
-            <a:avLst/>
-          </a:prstGeom>
-          <a:noFill/>
-          <a:ln/>
-        </p:spPr>
-        <p:txBody>
-          <a:bodyPr wrap="square" lIns="0" tIns="0" rIns="0" bIns="0" rtlCol="0" anchor="ctr"/>
-          <a:lstStyle/>
-          <a:p>
-            <a:pPr algn="ctr" indent="0" marL="0">
-              <a:buNone/>
-            </a:pPr>
-            <a:r>
-              <a:rPr lang="en-US" sz="800" dirty="0">
-                <a:solidFill>
-                  <a:srgbClr val="7F7F7F"/>
-                </a:solidFill>
-                <a:latin typeface="Arial" pitchFamily="34" charset="0"/>
-                <a:ea typeface="Arial" pitchFamily="34" charset="-122"/>
-                <a:cs typeface="Arial" pitchFamily="34" charset="-120"/>
-              </a:rPr>
-              <a:t>RESTRICTED</a:t>
-            </a:r>
-            <a:endParaRPr lang="en-US" sz="800" dirty="0"/>
-          </a:p>
-        </p:txBody>
-      </p:sp>
-      <p:sp>
-        <p:nvSpPr>
-          <p:cNvPr id="6" name="!!task"/>
+          <p:cNvPr id="5" name="!!task"/>
           <p:cNvSpPr/>
           <p:nvPr/>
         </p:nvSpPr>
@@ -12482,7 +12248,7 @@
       </p:sp>
       <p:pic>
         <p:nvPicPr>
-          <p:cNvPr id="7" name="!!taski" descr="/tmp/deck-icons/TbTicket_2C2C2A.png">    </p:cNvPr>
+          <p:cNvPr id="6" name="!!taski" descr="/tmp/deck-icons/TbTicket_2C2C2A.png">    </p:cNvPr>
           <p:cNvPicPr>
             <a:picLocks noChangeAspect="1"/>
           </p:cNvPicPr>
@@ -12506,7 +12272,7 @@
       </p:pic>
       <p:sp>
         <p:nvSpPr>
-          <p:cNvPr id="8" name="!!taskl"/>
+          <p:cNvPr id="7" name="!!taskl"/>
           <p:cNvSpPr txBox="1"/>
           <p:nvPr/>
         </p:nvSpPr>
@@ -12545,7 +12311,7 @@
       </p:sp>
       <p:sp>
         <p:nvSpPr>
-          <p:cNvPr id="9" name="!!lt1a"/>
+          <p:cNvPr id="8" name="!!lt1a"/>
           <p:cNvSpPr/>
           <p:nvPr/>
         </p:nvSpPr>
@@ -12568,7 +12334,7 @@
       </p:sp>
       <p:sp>
         <p:nvSpPr>
-          <p:cNvPr id="10" name="!!lt1b"/>
+          <p:cNvPr id="9" name="!!lt1b"/>
           <p:cNvSpPr/>
           <p:nvPr/>
         </p:nvSpPr>
@@ -12592,7 +12358,7 @@
       </p:sp>
       <p:sp>
         <p:nvSpPr>
-          <p:cNvPr id="11" name="!!lpw"/>
+          <p:cNvPr id="10" name="!!lpw"/>
           <p:cNvSpPr/>
           <p:nvPr/>
         </p:nvSpPr>
@@ -12616,7 +12382,7 @@
       </p:sp>
       <p:sp>
         <p:nvSpPr>
-          <p:cNvPr id="12" name="!!lwc"/>
+          <p:cNvPr id="11" name="!!lwc"/>
           <p:cNvSpPr/>
           <p:nvPr/>
         </p:nvSpPr>
@@ -12640,7 +12406,7 @@
       </p:sp>
       <p:sp>
         <p:nvSpPr>
-          <p:cNvPr id="13" name="!!fb1"/>
+          <p:cNvPr id="12" name="!!fb1"/>
           <p:cNvSpPr/>
           <p:nvPr/>
         </p:nvSpPr>
@@ -12663,7 +12429,7 @@
       </p:sp>
       <p:sp>
         <p:nvSpPr>
-          <p:cNvPr id="14" name="!!fb2"/>
+          <p:cNvPr id="13" name="!!fb2"/>
           <p:cNvSpPr/>
           <p:nvPr/>
         </p:nvSpPr>
@@ -12686,7 +12452,7 @@
       </p:sp>
       <p:sp>
         <p:nvSpPr>
-          <p:cNvPr id="15" name="!!fb3"/>
+          <p:cNvPr id="14" name="!!fb3"/>
           <p:cNvSpPr/>
           <p:nvPr/>
         </p:nvSpPr>
@@ -12710,7 +12476,7 @@
       </p:sp>
       <p:sp>
         <p:nvSpPr>
-          <p:cNvPr id="16" name="!!j0"/>
+          <p:cNvPr id="15" name="!!j0"/>
           <p:cNvSpPr/>
           <p:nvPr/>
         </p:nvSpPr>
@@ -12745,7 +12511,7 @@
       </p:sp>
       <p:pic>
         <p:nvPicPr>
-          <p:cNvPr id="17" name="!!ji0" descr="/tmp/deck-icons/TbBrain_534AB7.png">    </p:cNvPr>
+          <p:cNvPr id="16" name="!!ji0" descr="/tmp/deck-icons/TbBrain_534AB7.png">    </p:cNvPr>
           <p:cNvPicPr>
             <a:picLocks noChangeAspect="1"/>
           </p:cNvPicPr>
@@ -12769,7 +12535,7 @@
       </p:pic>
       <p:sp>
         <p:nvSpPr>
-          <p:cNvPr id="18" name="!!jl0"/>
+          <p:cNvPr id="17" name="!!jl0"/>
           <p:cNvSpPr txBox="1"/>
           <p:nvPr/>
         </p:nvSpPr>
@@ -12808,7 +12574,7 @@
       </p:sp>
       <p:sp>
         <p:nvSpPr>
-          <p:cNvPr id="19" name="!!j1"/>
+          <p:cNvPr id="18" name="!!j1"/>
           <p:cNvSpPr/>
           <p:nvPr/>
         </p:nvSpPr>
@@ -12843,7 +12609,7 @@
       </p:sp>
       <p:pic>
         <p:nvPicPr>
-          <p:cNvPr id="20" name="!!ji1" descr="/tmp/deck-icons/TbTool_0F6E56.png">    </p:cNvPr>
+          <p:cNvPr id="19" name="!!ji1" descr="/tmp/deck-icons/TbTool_0F6E56.png">    </p:cNvPr>
           <p:cNvPicPr>
             <a:picLocks noChangeAspect="1"/>
           </p:cNvPicPr>
@@ -12867,7 +12633,7 @@
       </p:pic>
       <p:sp>
         <p:nvSpPr>
-          <p:cNvPr id="21" name="!!jl1"/>
+          <p:cNvPr id="20" name="!!jl1"/>
           <p:cNvSpPr txBox="1"/>
           <p:nvPr/>
         </p:nvSpPr>
@@ -12906,7 +12672,7 @@
       </p:sp>
       <p:sp>
         <p:nvSpPr>
-          <p:cNvPr id="22" name="!!j2"/>
+          <p:cNvPr id="21" name="!!j2"/>
           <p:cNvSpPr/>
           <p:nvPr/>
         </p:nvSpPr>
@@ -12941,7 +12707,7 @@
       </p:sp>
       <p:pic>
         <p:nvPicPr>
-          <p:cNvPr id="23" name="!!ji2" descr="/tmp/deck-icons/TbChecklist_993C1D.png">    </p:cNvPr>
+          <p:cNvPr id="22" name="!!ji2" descr="/tmp/deck-icons/TbChecklist_993C1D.png">    </p:cNvPr>
           <p:cNvPicPr>
             <a:picLocks noChangeAspect="1"/>
           </p:cNvPicPr>
@@ -12965,7 +12731,7 @@
       </p:pic>
       <p:sp>
         <p:nvSpPr>
-          <p:cNvPr id="24" name="!!jl2"/>
+          <p:cNvPr id="23" name="!!jl2"/>
           <p:cNvSpPr txBox="1"/>
           <p:nvPr/>
         </p:nvSpPr>
@@ -13004,7 +12770,7 @@
       </p:sp>
       <p:sp>
         <p:nvSpPr>
-          <p:cNvPr id="25" name="!!own0"/>
+          <p:cNvPr id="24" name="!!own0"/>
           <p:cNvSpPr/>
           <p:nvPr/>
         </p:nvSpPr>
@@ -13052,7 +12818,7 @@
       </p:sp>
       <p:sp>
         <p:nvSpPr>
-          <p:cNvPr id="26" name="!!owl0"/>
+          <p:cNvPr id="25" name="!!owl0"/>
           <p:cNvSpPr/>
           <p:nvPr/>
         </p:nvSpPr>
@@ -13076,7 +12842,7 @@
       </p:sp>
       <p:sp>
         <p:nvSpPr>
-          <p:cNvPr id="27" name="!!own1"/>
+          <p:cNvPr id="26" name="!!own1"/>
           <p:cNvSpPr/>
           <p:nvPr/>
         </p:nvSpPr>
@@ -13124,7 +12890,7 @@
       </p:sp>
       <p:sp>
         <p:nvSpPr>
-          <p:cNvPr id="28" name="!!owl1"/>
+          <p:cNvPr id="27" name="!!owl1"/>
           <p:cNvSpPr/>
           <p:nvPr/>
         </p:nvSpPr>
@@ -13148,7 +12914,7 @@
       </p:sp>
       <p:sp>
         <p:nvSpPr>
-          <p:cNvPr id="29" name="!!own2"/>
+          <p:cNvPr id="28" name="!!own2"/>
           <p:cNvSpPr/>
           <p:nvPr/>
         </p:nvSpPr>
@@ -13196,7 +12962,7 @@
       </p:sp>
       <p:sp>
         <p:nvSpPr>
-          <p:cNvPr id="30" name="!!owl2"/>
+          <p:cNvPr id="29" name="!!owl2"/>
           <p:cNvSpPr/>
           <p:nvPr/>
         </p:nvSpPr>
@@ -13220,7 +12986,7 @@
       </p:sp>
       <p:sp>
         <p:nvSpPr>
-          <p:cNvPr id="31" name="!!retry"/>
+          <p:cNvPr id="30" name="!!retry"/>
           <p:cNvSpPr/>
           <p:nvPr/>
         </p:nvSpPr>
@@ -13268,7 +13034,7 @@
       </p:sp>
       <p:pic>
         <p:nvPicPr>
-          <p:cNvPr id="32" name="!!flag0" descr="/tmp/deck-icons/TbFlag_5F5E5A.png">    </p:cNvPr>
+          <p:cNvPr id="31" name="!!flag0" descr="/tmp/deck-icons/TbFlag_5F5E5A.png">    </p:cNvPr>
           <p:cNvPicPr>
             <a:picLocks noChangeAspect="1"/>
           </p:cNvPicPr>
@@ -13292,7 +13058,7 @@
       </p:pic>
       <p:pic>
         <p:nvPicPr>
-          <p:cNvPr id="33" name="!!flag1" descr="/tmp/deck-icons/TbFlag_5F5E5A.png">    </p:cNvPr>
+          <p:cNvPr id="32" name="!!flag1" descr="/tmp/deck-icons/TbFlag_5F5E5A.png">    </p:cNvPr>
           <p:cNvPicPr>
             <a:picLocks noChangeAspect="1"/>
           </p:cNvPicPr>
@@ -13316,7 +13082,7 @@
       </p:pic>
       <p:sp>
         <p:nvSpPr>
-          <p:cNvPr id="34" name="!!lockc"/>
+          <p:cNvPr id="33" name="!!lockc"/>
           <p:cNvSpPr/>
           <p:nvPr/>
         </p:nvSpPr>
@@ -13351,7 +13117,7 @@
       </p:sp>
       <p:pic>
         <p:nvPicPr>
-          <p:cNvPr id="35" name="!!locki" descr="/tmp/deck-icons/TbLock_993C1D.png">    </p:cNvPr>
+          <p:cNvPr id="34" name="!!locki" descr="/tmp/deck-icons/TbLock_993C1D.png">    </p:cNvPr>
           <p:cNvPicPr>
             <a:picLocks noChangeAspect="1"/>
           </p:cNvPicPr>
@@ -13375,7 +13141,7 @@
       </p:pic>
       <p:sp>
         <p:nvSpPr>
-          <p:cNvPr id="36" name="!!pP"/>
+          <p:cNvPr id="35" name="!!pP"/>
           <p:cNvSpPr/>
           <p:nvPr/>
         </p:nvSpPr>
@@ -13423,7 +13189,7 @@
       </p:sp>
       <p:sp>
         <p:nvSpPr>
-          <p:cNvPr id="37" name="!!pW"/>
+          <p:cNvPr id="36" name="!!pW"/>
           <p:cNvSpPr/>
           <p:nvPr/>
         </p:nvSpPr>
@@ -13471,7 +13237,7 @@
       </p:sp>
       <p:sp>
         <p:nvSpPr>
-          <p:cNvPr id="38" name="!!pF"/>
+          <p:cNvPr id="37" name="!!pF"/>
           <p:cNvSpPr/>
           <p:nvPr/>
         </p:nvSpPr>
@@ -13519,7 +13285,7 @@
       </p:sp>
       <p:sp>
         <p:nvSpPr>
-          <p:cNvPr id="39" name="!!pstep"/>
+          <p:cNvPr id="38" name="!!pstep"/>
           <p:cNvSpPr txBox="1"/>
           <p:nvPr/>
         </p:nvSpPr>
@@ -13558,7 +13324,7 @@
       </p:sp>
       <p:sp>
         <p:nvSpPr>
-          <p:cNvPr id="40" name="!!pname"/>
+          <p:cNvPr id="39" name="!!pname"/>
           <p:cNvSpPr txBox="1"/>
           <p:nvPr/>
         </p:nvSpPr>
@@ -13597,7 +13363,7 @@
       </p:sp>
       <p:sp>
         <p:nvSpPr>
-          <p:cNvPr id="41" name="!!pcap"/>
+          <p:cNvPr id="40" name="!!pcap"/>
           <p:cNvSpPr txBox="1"/>
           <p:nvPr/>
         </p:nvSpPr>
@@ -13636,7 +13402,7 @@
       </p:sp>
       <p:pic>
         <p:nvPicPr>
-          <p:cNvPr id="42" name="!!cki0" descr="/tmp/deck-icons/TbCircleCheck_1D9E75.png">    </p:cNvPr>
+          <p:cNvPr id="41" name="!!cki0" descr="/tmp/deck-icons/TbCircleCheck_1D9E75.png">    </p:cNvPr>
           <p:cNvPicPr>
             <a:picLocks noChangeAspect="1"/>
           </p:cNvPicPr>
@@ -13660,7 +13426,7 @@
       </p:pic>
       <p:sp>
         <p:nvSpPr>
-          <p:cNvPr id="43" name="!!ckt0"/>
+          <p:cNvPr id="42" name="!!ckt0"/>
           <p:cNvSpPr txBox="1"/>
           <p:nvPr/>
         </p:nvSpPr>
@@ -13699,7 +13465,7 @@
       </p:sp>
       <p:pic>
         <p:nvPicPr>
-          <p:cNvPr id="44" name="!!cki1" descr="/tmp/deck-icons/TbCircleCheck_1D9E75.png">    </p:cNvPr>
+          <p:cNvPr id="43" name="!!cki1" descr="/tmp/deck-icons/TbCircleCheck_1D9E75.png">    </p:cNvPr>
           <p:cNvPicPr>
             <a:picLocks noChangeAspect="1"/>
           </p:cNvPicPr>
@@ -13723,7 +13489,7 @@
       </p:pic>
       <p:sp>
         <p:nvSpPr>
-          <p:cNvPr id="45" name="!!ckt1"/>
+          <p:cNvPr id="44" name="!!ckt1"/>
           <p:cNvSpPr txBox="1"/>
           <p:nvPr/>
         </p:nvSpPr>
@@ -13762,7 +13528,7 @@
       </p:sp>
       <p:pic>
         <p:nvPicPr>
-          <p:cNvPr id="46" name="!!cki2" descr="/tmp/deck-icons/TbCircleCheck_1D9E75.png">    </p:cNvPr>
+          <p:cNvPr id="45" name="!!cki2" descr="/tmp/deck-icons/TbCircleCheck_1D9E75.png">    </p:cNvPr>
           <p:cNvPicPr>
             <a:picLocks noChangeAspect="1"/>
           </p:cNvPicPr>
@@ -13786,7 +13552,7 @@
       </p:pic>
       <p:sp>
         <p:nvSpPr>
-          <p:cNvPr id="47" name="!!ckt2"/>
+          <p:cNvPr id="46" name="!!ckt2"/>
           <p:cNvSpPr txBox="1"/>
           <p:nvPr/>
         </p:nvSpPr>
@@ -13825,7 +13591,7 @@
       </p:sp>
       <p:pic>
         <p:nvPicPr>
-          <p:cNvPr id="48" name="!!cki3" descr="/tmp/deck-icons/TbCircleCheck_1D9E75.png">    </p:cNvPr>
+          <p:cNvPr id="47" name="!!cki3" descr="/tmp/deck-icons/TbCircleCheck_1D9E75.png">    </p:cNvPr>
           <p:cNvPicPr>
             <a:picLocks noChangeAspect="1"/>
           </p:cNvPicPr>
@@ -13849,7 +13615,7 @@
       </p:pic>
       <p:sp>
         <p:nvSpPr>
-          <p:cNvPr id="49" name="!!ckt3"/>
+          <p:cNvPr id="48" name="!!ckt3"/>
           <p:cNvSpPr txBox="1"/>
           <p:nvPr/>
         </p:nvSpPr>
@@ -13888,7 +13654,7 @@
       </p:sp>
       <p:pic>
         <p:nvPicPr>
-          <p:cNvPr id="50" name="!!cki4" descr="/tmp/deck-icons/TbCircleCheck_1D9E75.png">    </p:cNvPr>
+          <p:cNvPr id="49" name="!!cki4" descr="/tmp/deck-icons/TbCircleCheck_1D9E75.png">    </p:cNvPr>
           <p:cNvPicPr>
             <a:picLocks noChangeAspect="1"/>
           </p:cNvPicPr>
@@ -13912,7 +13678,7 @@
       </p:pic>
       <p:sp>
         <p:nvSpPr>
-          <p:cNvPr id="51" name="!!ckt4"/>
+          <p:cNvPr id="50" name="!!ckt4"/>
           <p:cNvSpPr txBox="1"/>
           <p:nvPr/>
         </p:nvSpPr>
@@ -13951,7 +13717,7 @@
       </p:sp>
       <p:sp>
         <p:nvSpPr>
-          <p:cNvPr id="52" name="!!take5"/>
+          <p:cNvPr id="51" name="!!take5"/>
           <p:cNvSpPr txBox="1"/>
           <p:nvPr/>
         </p:nvSpPr>
@@ -14214,42 +13980,7 @@
       </p:sp>
       <p:sp>
         <p:nvSpPr>
-          <p:cNvPr id="6" name="TextBox 5"/>
-          <p:cNvSpPr txBox="1"/>
-          <p:nvPr/>
-        </p:nvSpPr>
-        <p:spPr>
-          <a:xfrm>
-            <a:off x="5184648" y="6556248"/>
-            <a:ext cx="1828800" cy="201168"/>
-          </a:xfrm>
-          <a:prstGeom prst="rect">
-            <a:avLst/>
-          </a:prstGeom>
-          <a:noFill/>
-        </p:spPr>
-        <p:txBody>
-          <a:bodyPr wrap="square" lIns="0" rIns="0" tIns="0" bIns="0" anchor="t">
-            <a:spAutoFit/>
-          </a:bodyPr>
-          <a:lstStyle/>
-          <a:p>
-            <a:pPr algn="ctr"/>
-            <a:r>
-              <a:rPr sz="800" b="0" i="0">
-                <a:solidFill>
-                  <a:srgbClr val="7F7F7F"/>
-                </a:solidFill>
-                <a:latin typeface="Arial"/>
-              </a:rPr>
-              <a:t>RESTRICTED</a:t>
-            </a:r>
-          </a:p>
-        </p:txBody>
-      </p:sp>
-      <p:sp>
-        <p:nvSpPr>
-          <p:cNvPr id="7" name="Rounded Rectangle 6"/>
+          <p:cNvPr id="6" name="Rounded Rectangle 5"/>
           <p:cNvSpPr/>
           <p:nvPr/>
         </p:nvSpPr>
@@ -14297,7 +14028,7 @@
       </p:sp>
       <p:pic>
         <p:nvPicPr>
-          <p:cNvPr id="8" name="Picture 7" descr="2-why-single-agents-fail-happy-path.gif"/>
+          <p:cNvPr id="7" name="Picture 6" descr="2-why-single-agents-fail-happy-path.gif"/>
           <p:cNvPicPr>
             <a:picLocks noChangeAspect="1"/>
           </p:cNvPicPr>
@@ -14321,7 +14052,7 @@
       </p:pic>
       <p:sp>
         <p:nvSpPr>
-          <p:cNvPr id="9" name="Rounded Rectangle 8"/>
+          <p:cNvPr id="8" name="Rounded Rectangle 7"/>
           <p:cNvSpPr/>
           <p:nvPr/>
         </p:nvSpPr>
@@ -14379,7 +14110,7 @@
       </p:sp>
       <p:sp>
         <p:nvSpPr>
-          <p:cNvPr id="10" name="TextBox 9"/>
+          <p:cNvPr id="9" name="TextBox 8"/>
           <p:cNvSpPr txBox="1"/>
           <p:nvPr/>
         </p:nvSpPr>
@@ -14577,42 +14308,7 @@
       </p:sp>
       <p:sp>
         <p:nvSpPr>
-          <p:cNvPr id="6" name="TextBox 5"/>
-          <p:cNvSpPr txBox="1"/>
-          <p:nvPr/>
-        </p:nvSpPr>
-        <p:spPr>
-          <a:xfrm>
-            <a:off x="5184648" y="6556248"/>
-            <a:ext cx="1828800" cy="201168"/>
-          </a:xfrm>
-          <a:prstGeom prst="rect">
-            <a:avLst/>
-          </a:prstGeom>
-          <a:noFill/>
-        </p:spPr>
-        <p:txBody>
-          <a:bodyPr wrap="square" lIns="0" rIns="0" tIns="0" bIns="0" anchor="t">
-            <a:spAutoFit/>
-          </a:bodyPr>
-          <a:lstStyle/>
-          <a:p>
-            <a:pPr algn="ctr"/>
-            <a:r>
-              <a:rPr sz="800" b="0" i="0">
-                <a:solidFill>
-                  <a:srgbClr val="7F7F7F"/>
-                </a:solidFill>
-                <a:latin typeface="Arial"/>
-              </a:rPr>
-              <a:t>RESTRICTED</a:t>
-            </a:r>
-          </a:p>
-        </p:txBody>
-      </p:sp>
-      <p:sp>
-        <p:nvSpPr>
-          <p:cNvPr id="7" name="Rounded Rectangle 6"/>
+          <p:cNvPr id="6" name="Rounded Rectangle 5"/>
           <p:cNvSpPr/>
           <p:nvPr/>
         </p:nvSpPr>
@@ -14660,7 +14356,7 @@
       </p:sp>
       <p:pic>
         <p:nvPicPr>
-          <p:cNvPr id="8" name="Picture 7" descr="2-why-single-agents-fail-chaotic-path.gif"/>
+          <p:cNvPr id="7" name="Picture 6" descr="2-why-single-agents-fail-chaotic-path.gif"/>
           <p:cNvPicPr>
             <a:picLocks noChangeAspect="1"/>
           </p:cNvPicPr>
@@ -14684,7 +14380,7 @@
       </p:pic>
       <p:sp>
         <p:nvSpPr>
-          <p:cNvPr id="9" name="Rounded Rectangle 8"/>
+          <p:cNvPr id="8" name="Rounded Rectangle 7"/>
           <p:cNvSpPr/>
           <p:nvPr/>
         </p:nvSpPr>
@@ -14742,7 +14438,7 @@
       </p:sp>
       <p:sp>
         <p:nvSpPr>
-          <p:cNvPr id="10" name="TextBox 9"/>
+          <p:cNvPr id="9" name="TextBox 8"/>
           <p:cNvSpPr txBox="1"/>
           <p:nvPr/>
         </p:nvSpPr>
@@ -14940,42 +14636,7 @@
       </p:sp>
       <p:sp>
         <p:nvSpPr>
-          <p:cNvPr id="6" name="TextBox 5"/>
-          <p:cNvSpPr txBox="1"/>
-          <p:nvPr/>
-        </p:nvSpPr>
-        <p:spPr>
-          <a:xfrm>
-            <a:off x="5184648" y="6556248"/>
-            <a:ext cx="1828800" cy="201168"/>
-          </a:xfrm>
-          <a:prstGeom prst="rect">
-            <a:avLst/>
-          </a:prstGeom>
-          <a:noFill/>
-        </p:spPr>
-        <p:txBody>
-          <a:bodyPr wrap="square" lIns="0" rIns="0" tIns="0" bIns="0" anchor="t">
-            <a:spAutoFit/>
-          </a:bodyPr>
-          <a:lstStyle/>
-          <a:p>
-            <a:pPr algn="ctr"/>
-            <a:r>
-              <a:rPr sz="800" b="0" i="0">
-                <a:solidFill>
-                  <a:srgbClr val="7F7F7F"/>
-                </a:solidFill>
-                <a:latin typeface="Arial"/>
-              </a:rPr>
-              <a:t>RESTRICTED</a:t>
-            </a:r>
-          </a:p>
-        </p:txBody>
-      </p:sp>
-      <p:sp>
-        <p:nvSpPr>
-          <p:cNvPr id="7" name="Rounded Rectangle 6"/>
+          <p:cNvPr id="6" name="Rounded Rectangle 5"/>
           <p:cNvSpPr/>
           <p:nvPr/>
         </p:nvSpPr>
@@ -15023,7 +14684,7 @@
       </p:sp>
       <p:pic>
         <p:nvPicPr>
-          <p:cNvPr id="8" name="Picture 7" descr="6-core-idea.gif"/>
+          <p:cNvPr id="7" name="Picture 6" descr="6-core-idea.gif"/>
           <p:cNvPicPr>
             <a:picLocks noChangeAspect="1"/>
           </p:cNvPicPr>
@@ -15047,7 +14708,7 @@
       </p:pic>
       <p:sp>
         <p:nvSpPr>
-          <p:cNvPr id="9" name="Rounded Rectangle 8"/>
+          <p:cNvPr id="8" name="Rounded Rectangle 7"/>
           <p:cNvSpPr/>
           <p:nvPr/>
         </p:nvSpPr>
@@ -15105,7 +14766,7 @@
       </p:sp>
       <p:sp>
         <p:nvSpPr>
-          <p:cNvPr id="10" name="TextBox 9"/>
+          <p:cNvPr id="9" name="TextBox 8"/>
           <p:cNvSpPr txBox="1"/>
           <p:nvPr/>
         </p:nvSpPr>
